--- a/public/videos/repositories/allbowl01/allbowl01-tech-preview.pptx
+++ b/public/videos/repositories/allbowl01/allbowl01-tech-preview.pptx
@@ -134,7 +134,7 @@
           <p:cNvPr id="2" name="タイトル 1">
             <a:extLst>
               <a:ext uri="{FF2B5EF4-FFF2-40B4-BE49-F238E27FC236}">
-                <a16:creationId xmlns:a16="http://schemas.microsoft.com/office/drawing/2014/main" id="{A06B1A4A-DBC3-55F0-0FCC-5222821DFEB4}"/>
+                <a16:creationId xmlns:a16="http://schemas.microsoft.com/office/drawing/2014/main" id="{90B5AC26-4214-99C6-BBAF-B3231ADD16E0}"/>
               </a:ext>
             </a:extLst>
           </p:cNvPr>
@@ -171,7 +171,7 @@
           <p:cNvPr id="3" name="字幕 2">
             <a:extLst>
               <a:ext uri="{FF2B5EF4-FFF2-40B4-BE49-F238E27FC236}">
-                <a16:creationId xmlns:a16="http://schemas.microsoft.com/office/drawing/2014/main" id="{D3B39E2F-B735-8686-5409-CDB438DADB0C}"/>
+                <a16:creationId xmlns:a16="http://schemas.microsoft.com/office/drawing/2014/main" id="{A0217943-D1BB-6F0B-F84E-663A05E7C733}"/>
               </a:ext>
             </a:extLst>
           </p:cNvPr>
@@ -241,7 +241,7 @@
           <p:cNvPr id="4" name="日付プレースホルダー 3">
             <a:extLst>
               <a:ext uri="{FF2B5EF4-FFF2-40B4-BE49-F238E27FC236}">
-                <a16:creationId xmlns:a16="http://schemas.microsoft.com/office/drawing/2014/main" id="{0DEFE29D-67F1-3150-B5D7-93856A197CF6}"/>
+                <a16:creationId xmlns:a16="http://schemas.microsoft.com/office/drawing/2014/main" id="{779EF8F2-B947-3DF4-ED41-4C2ABAE7FB56}"/>
               </a:ext>
             </a:extLst>
           </p:cNvPr>
@@ -257,7 +257,7 @@
           <a:bodyPr/>
           <a:lstStyle/>
           <a:p>
-            <a:fld id="{26BAC62B-7712-4004-B83E-1B2BFE74FA4E}" type="datetimeFigureOut">
+            <a:fld id="{01DF3F40-F578-4070-8275-6AD5C9D05345}" type="datetimeFigureOut">
               <a:rPr kumimoji="1" lang="ja-JP" altLang="en-US" smtClean="0"/>
               <a:t>2026/7/30</a:t>
             </a:fld>
@@ -270,7 +270,7 @@
           <p:cNvPr id="5" name="フッター プレースホルダー 4">
             <a:extLst>
               <a:ext uri="{FF2B5EF4-FFF2-40B4-BE49-F238E27FC236}">
-                <a16:creationId xmlns:a16="http://schemas.microsoft.com/office/drawing/2014/main" id="{2BF7830C-B4E7-F538-00EA-1F49D576C763}"/>
+                <a16:creationId xmlns:a16="http://schemas.microsoft.com/office/drawing/2014/main" id="{96F768FF-2E0A-DCE3-8DC9-CC39B11A44CC}"/>
               </a:ext>
             </a:extLst>
           </p:cNvPr>
@@ -295,7 +295,7 @@
           <p:cNvPr id="6" name="スライド番号プレースホルダー 5">
             <a:extLst>
               <a:ext uri="{FF2B5EF4-FFF2-40B4-BE49-F238E27FC236}">
-                <a16:creationId xmlns:a16="http://schemas.microsoft.com/office/drawing/2014/main" id="{21DBA11B-89EB-BDB0-5D0C-C844B373C7FA}"/>
+                <a16:creationId xmlns:a16="http://schemas.microsoft.com/office/drawing/2014/main" id="{00F5972F-4585-3EE6-B0E0-F5A1FC4C9654}"/>
               </a:ext>
             </a:extLst>
           </p:cNvPr>
@@ -311,7 +311,7 @@
           <a:bodyPr/>
           <a:lstStyle/>
           <a:p>
-            <a:fld id="{28C83F49-008A-445D-8DBC-B105F38EDDDB}" type="slidenum">
+            <a:fld id="{F8D92D34-3AA4-4C1C-B030-5CB7F31C0DCF}" type="slidenum">
               <a:rPr kumimoji="1" lang="ja-JP" altLang="en-US" smtClean="0"/>
               <a:t>‹#›</a:t>
             </a:fld>
@@ -322,7 +322,7 @@
     </p:spTree>
     <p:extLst>
       <p:ext uri="{BB962C8B-B14F-4D97-AF65-F5344CB8AC3E}">
-        <p14:creationId xmlns:p14="http://schemas.microsoft.com/office/powerpoint/2010/main" val="1252598303"/>
+        <p14:creationId xmlns:p14="http://schemas.microsoft.com/office/powerpoint/2010/main" val="3730396715"/>
       </p:ext>
     </p:extLst>
   </p:cSld>
@@ -354,7 +354,7 @@
           <p:cNvPr id="2" name="タイトル 1">
             <a:extLst>
               <a:ext uri="{FF2B5EF4-FFF2-40B4-BE49-F238E27FC236}">
-                <a16:creationId xmlns:a16="http://schemas.microsoft.com/office/drawing/2014/main" id="{AD742D4A-3364-7B46-63F7-0A96EC97029A}"/>
+                <a16:creationId xmlns:a16="http://schemas.microsoft.com/office/drawing/2014/main" id="{47C3F8A8-43F8-EC23-11F8-F39469F385FA}"/>
               </a:ext>
             </a:extLst>
           </p:cNvPr>
@@ -382,7 +382,7 @@
           <p:cNvPr id="3" name="縦書きテキスト プレースホルダー 2">
             <a:extLst>
               <a:ext uri="{FF2B5EF4-FFF2-40B4-BE49-F238E27FC236}">
-                <a16:creationId xmlns:a16="http://schemas.microsoft.com/office/drawing/2014/main" id="{604397AD-3870-B684-A5E5-3905C171BD1C}"/>
+                <a16:creationId xmlns:a16="http://schemas.microsoft.com/office/drawing/2014/main" id="{CEB7D51A-9FB8-B516-29FC-571FBDA4662C}"/>
               </a:ext>
             </a:extLst>
           </p:cNvPr>
@@ -471,7 +471,7 @@
           <p:cNvPr id="4" name="日付プレースホルダー 3">
             <a:extLst>
               <a:ext uri="{FF2B5EF4-FFF2-40B4-BE49-F238E27FC236}">
-                <a16:creationId xmlns:a16="http://schemas.microsoft.com/office/drawing/2014/main" id="{B87EDB78-C0E7-C41E-1B41-3DEC967923F2}"/>
+                <a16:creationId xmlns:a16="http://schemas.microsoft.com/office/drawing/2014/main" id="{38CB4DC2-ADEE-A181-D715-743DB3167185}"/>
               </a:ext>
             </a:extLst>
           </p:cNvPr>
@@ -487,7 +487,7 @@
           <a:bodyPr/>
           <a:lstStyle/>
           <a:p>
-            <a:fld id="{26BAC62B-7712-4004-B83E-1B2BFE74FA4E}" type="datetimeFigureOut">
+            <a:fld id="{01DF3F40-F578-4070-8275-6AD5C9D05345}" type="datetimeFigureOut">
               <a:rPr kumimoji="1" lang="ja-JP" altLang="en-US" smtClean="0"/>
               <a:t>2026/7/30</a:t>
             </a:fld>
@@ -500,7 +500,7 @@
           <p:cNvPr id="5" name="フッター プレースホルダー 4">
             <a:extLst>
               <a:ext uri="{FF2B5EF4-FFF2-40B4-BE49-F238E27FC236}">
-                <a16:creationId xmlns:a16="http://schemas.microsoft.com/office/drawing/2014/main" id="{CB7CA699-3313-6FE6-D431-A61E4478FFBD}"/>
+                <a16:creationId xmlns:a16="http://schemas.microsoft.com/office/drawing/2014/main" id="{CEE79E9D-512A-9032-E250-54801CC35C38}"/>
               </a:ext>
             </a:extLst>
           </p:cNvPr>
@@ -525,7 +525,7 @@
           <p:cNvPr id="6" name="スライド番号プレースホルダー 5">
             <a:extLst>
               <a:ext uri="{FF2B5EF4-FFF2-40B4-BE49-F238E27FC236}">
-                <a16:creationId xmlns:a16="http://schemas.microsoft.com/office/drawing/2014/main" id="{F161B4E1-1C42-CB59-A2A0-9C837E459491}"/>
+                <a16:creationId xmlns:a16="http://schemas.microsoft.com/office/drawing/2014/main" id="{6AF0A8CD-E583-1FA1-0810-AA90EAA1CA81}"/>
               </a:ext>
             </a:extLst>
           </p:cNvPr>
@@ -541,7 +541,7 @@
           <a:bodyPr/>
           <a:lstStyle/>
           <a:p>
-            <a:fld id="{28C83F49-008A-445D-8DBC-B105F38EDDDB}" type="slidenum">
+            <a:fld id="{F8D92D34-3AA4-4C1C-B030-5CB7F31C0DCF}" type="slidenum">
               <a:rPr kumimoji="1" lang="ja-JP" altLang="en-US" smtClean="0"/>
               <a:t>‹#›</a:t>
             </a:fld>
@@ -552,7 +552,7 @@
     </p:spTree>
     <p:extLst>
       <p:ext uri="{BB962C8B-B14F-4D97-AF65-F5344CB8AC3E}">
-        <p14:creationId xmlns:p14="http://schemas.microsoft.com/office/powerpoint/2010/main" val="2670595489"/>
+        <p14:creationId xmlns:p14="http://schemas.microsoft.com/office/powerpoint/2010/main" val="34695970"/>
       </p:ext>
     </p:extLst>
   </p:cSld>
@@ -584,7 +584,7 @@
           <p:cNvPr id="2" name="縦書きタイトル 1">
             <a:extLst>
               <a:ext uri="{FF2B5EF4-FFF2-40B4-BE49-F238E27FC236}">
-                <a16:creationId xmlns:a16="http://schemas.microsoft.com/office/drawing/2014/main" id="{6EB73679-2397-4711-F8C3-8CA71E468FEB}"/>
+                <a16:creationId xmlns:a16="http://schemas.microsoft.com/office/drawing/2014/main" id="{7100C6CC-B385-DDDE-A83B-3FD8E4A51DB0}"/>
               </a:ext>
             </a:extLst>
           </p:cNvPr>
@@ -617,7 +617,7 @@
           <p:cNvPr id="3" name="縦書きテキスト プレースホルダー 2">
             <a:extLst>
               <a:ext uri="{FF2B5EF4-FFF2-40B4-BE49-F238E27FC236}">
-                <a16:creationId xmlns:a16="http://schemas.microsoft.com/office/drawing/2014/main" id="{CA1A5493-A3B7-AE5D-6086-14B2C1665623}"/>
+                <a16:creationId xmlns:a16="http://schemas.microsoft.com/office/drawing/2014/main" id="{2C7D6F0E-4BE5-BBE1-BFDD-A668A20036B3}"/>
               </a:ext>
             </a:extLst>
           </p:cNvPr>
@@ -711,7 +711,7 @@
           <p:cNvPr id="4" name="日付プレースホルダー 3">
             <a:extLst>
               <a:ext uri="{FF2B5EF4-FFF2-40B4-BE49-F238E27FC236}">
-                <a16:creationId xmlns:a16="http://schemas.microsoft.com/office/drawing/2014/main" id="{E8C674C4-9D9C-D578-18BB-8138FF9B78BE}"/>
+                <a16:creationId xmlns:a16="http://schemas.microsoft.com/office/drawing/2014/main" id="{092778A5-4F11-B00D-B135-E7DD44FE4385}"/>
               </a:ext>
             </a:extLst>
           </p:cNvPr>
@@ -727,7 +727,7 @@
           <a:bodyPr/>
           <a:lstStyle/>
           <a:p>
-            <a:fld id="{26BAC62B-7712-4004-B83E-1B2BFE74FA4E}" type="datetimeFigureOut">
+            <a:fld id="{01DF3F40-F578-4070-8275-6AD5C9D05345}" type="datetimeFigureOut">
               <a:rPr kumimoji="1" lang="ja-JP" altLang="en-US" smtClean="0"/>
               <a:t>2026/7/30</a:t>
             </a:fld>
@@ -740,7 +740,7 @@
           <p:cNvPr id="5" name="フッター プレースホルダー 4">
             <a:extLst>
               <a:ext uri="{FF2B5EF4-FFF2-40B4-BE49-F238E27FC236}">
-                <a16:creationId xmlns:a16="http://schemas.microsoft.com/office/drawing/2014/main" id="{419FA6AA-C88E-D703-80BD-E2CB240D97B2}"/>
+                <a16:creationId xmlns:a16="http://schemas.microsoft.com/office/drawing/2014/main" id="{0C646513-127D-F565-A9D8-2BC46EC6C47B}"/>
               </a:ext>
             </a:extLst>
           </p:cNvPr>
@@ -765,7 +765,7 @@
           <p:cNvPr id="6" name="スライド番号プレースホルダー 5">
             <a:extLst>
               <a:ext uri="{FF2B5EF4-FFF2-40B4-BE49-F238E27FC236}">
-                <a16:creationId xmlns:a16="http://schemas.microsoft.com/office/drawing/2014/main" id="{2E1720D1-22C4-BA8D-3639-E8DCA7C8AB15}"/>
+                <a16:creationId xmlns:a16="http://schemas.microsoft.com/office/drawing/2014/main" id="{FFB184D4-7499-83C2-1A99-4C7DF3B9978E}"/>
               </a:ext>
             </a:extLst>
           </p:cNvPr>
@@ -781,7 +781,7 @@
           <a:bodyPr/>
           <a:lstStyle/>
           <a:p>
-            <a:fld id="{28C83F49-008A-445D-8DBC-B105F38EDDDB}" type="slidenum">
+            <a:fld id="{F8D92D34-3AA4-4C1C-B030-5CB7F31C0DCF}" type="slidenum">
               <a:rPr kumimoji="1" lang="ja-JP" altLang="en-US" smtClean="0"/>
               <a:t>‹#›</a:t>
             </a:fld>
@@ -792,7 +792,7 @@
     </p:spTree>
     <p:extLst>
       <p:ext uri="{BB962C8B-B14F-4D97-AF65-F5344CB8AC3E}">
-        <p14:creationId xmlns:p14="http://schemas.microsoft.com/office/powerpoint/2010/main" val="554727075"/>
+        <p14:creationId xmlns:p14="http://schemas.microsoft.com/office/powerpoint/2010/main" val="1372581425"/>
       </p:ext>
     </p:extLst>
   </p:cSld>
@@ -824,7 +824,7 @@
           <p:cNvPr id="2" name="タイトル 1">
             <a:extLst>
               <a:ext uri="{FF2B5EF4-FFF2-40B4-BE49-F238E27FC236}">
-                <a16:creationId xmlns:a16="http://schemas.microsoft.com/office/drawing/2014/main" id="{BFE253EE-FE03-AD6E-B92F-369660895AD3}"/>
+                <a16:creationId xmlns:a16="http://schemas.microsoft.com/office/drawing/2014/main" id="{519C0844-49EC-76AE-B5B7-2867ED2CDF39}"/>
               </a:ext>
             </a:extLst>
           </p:cNvPr>
@@ -852,7 +852,7 @@
           <p:cNvPr id="3" name="コンテンツ プレースホルダー 2">
             <a:extLst>
               <a:ext uri="{FF2B5EF4-FFF2-40B4-BE49-F238E27FC236}">
-                <a16:creationId xmlns:a16="http://schemas.microsoft.com/office/drawing/2014/main" id="{69385F7B-AF0F-2BE6-0AFC-878ECC44DAD4}"/>
+                <a16:creationId xmlns:a16="http://schemas.microsoft.com/office/drawing/2014/main" id="{24AF36F9-A4CD-6BCA-B23C-709DD3383058}"/>
               </a:ext>
             </a:extLst>
           </p:cNvPr>
@@ -941,7 +941,7 @@
           <p:cNvPr id="4" name="日付プレースホルダー 3">
             <a:extLst>
               <a:ext uri="{FF2B5EF4-FFF2-40B4-BE49-F238E27FC236}">
-                <a16:creationId xmlns:a16="http://schemas.microsoft.com/office/drawing/2014/main" id="{1C52C37C-9D94-1AE9-ED3A-095CD07DC3DD}"/>
+                <a16:creationId xmlns:a16="http://schemas.microsoft.com/office/drawing/2014/main" id="{48DCB131-BFBC-F6A6-FA94-291B1438F8F0}"/>
               </a:ext>
             </a:extLst>
           </p:cNvPr>
@@ -957,7 +957,7 @@
           <a:bodyPr/>
           <a:lstStyle/>
           <a:p>
-            <a:fld id="{26BAC62B-7712-4004-B83E-1B2BFE74FA4E}" type="datetimeFigureOut">
+            <a:fld id="{01DF3F40-F578-4070-8275-6AD5C9D05345}" type="datetimeFigureOut">
               <a:rPr kumimoji="1" lang="ja-JP" altLang="en-US" smtClean="0"/>
               <a:t>2026/7/30</a:t>
             </a:fld>
@@ -970,7 +970,7 @@
           <p:cNvPr id="5" name="フッター プレースホルダー 4">
             <a:extLst>
               <a:ext uri="{FF2B5EF4-FFF2-40B4-BE49-F238E27FC236}">
-                <a16:creationId xmlns:a16="http://schemas.microsoft.com/office/drawing/2014/main" id="{5ECBD11D-3D4F-DF47-FE8C-0E2787729297}"/>
+                <a16:creationId xmlns:a16="http://schemas.microsoft.com/office/drawing/2014/main" id="{B79C587D-6292-4E8A-AF79-2FFDF995BBB1}"/>
               </a:ext>
             </a:extLst>
           </p:cNvPr>
@@ -995,7 +995,7 @@
           <p:cNvPr id="6" name="スライド番号プレースホルダー 5">
             <a:extLst>
               <a:ext uri="{FF2B5EF4-FFF2-40B4-BE49-F238E27FC236}">
-                <a16:creationId xmlns:a16="http://schemas.microsoft.com/office/drawing/2014/main" id="{FCE348D9-547E-2EEB-1473-C294F568FA37}"/>
+                <a16:creationId xmlns:a16="http://schemas.microsoft.com/office/drawing/2014/main" id="{96F52B43-3F5E-CA75-CC38-62BC3463AC8D}"/>
               </a:ext>
             </a:extLst>
           </p:cNvPr>
@@ -1011,7 +1011,7 @@
           <a:bodyPr/>
           <a:lstStyle/>
           <a:p>
-            <a:fld id="{28C83F49-008A-445D-8DBC-B105F38EDDDB}" type="slidenum">
+            <a:fld id="{F8D92D34-3AA4-4C1C-B030-5CB7F31C0DCF}" type="slidenum">
               <a:rPr kumimoji="1" lang="ja-JP" altLang="en-US" smtClean="0"/>
               <a:t>‹#›</a:t>
             </a:fld>
@@ -1022,7 +1022,7 @@
     </p:spTree>
     <p:extLst>
       <p:ext uri="{BB962C8B-B14F-4D97-AF65-F5344CB8AC3E}">
-        <p14:creationId xmlns:p14="http://schemas.microsoft.com/office/powerpoint/2010/main" val="2422352175"/>
+        <p14:creationId xmlns:p14="http://schemas.microsoft.com/office/powerpoint/2010/main" val="3975501056"/>
       </p:ext>
     </p:extLst>
   </p:cSld>
@@ -1054,7 +1054,7 @@
           <p:cNvPr id="2" name="タイトル 1">
             <a:extLst>
               <a:ext uri="{FF2B5EF4-FFF2-40B4-BE49-F238E27FC236}">
-                <a16:creationId xmlns:a16="http://schemas.microsoft.com/office/drawing/2014/main" id="{B0911548-A728-5D32-6344-7994AEA30C86}"/>
+                <a16:creationId xmlns:a16="http://schemas.microsoft.com/office/drawing/2014/main" id="{599B585F-DB4E-8469-9B6D-2286701D8B2E}"/>
               </a:ext>
             </a:extLst>
           </p:cNvPr>
@@ -1091,7 +1091,7 @@
           <p:cNvPr id="3" name="テキスト プレースホルダー 2">
             <a:extLst>
               <a:ext uri="{FF2B5EF4-FFF2-40B4-BE49-F238E27FC236}">
-                <a16:creationId xmlns:a16="http://schemas.microsoft.com/office/drawing/2014/main" id="{494610B8-DE4D-3A9E-49CF-C230AA379EAE}"/>
+                <a16:creationId xmlns:a16="http://schemas.microsoft.com/office/drawing/2014/main" id="{D22EB1FD-68EB-7789-3FCE-351ED98AF799}"/>
               </a:ext>
             </a:extLst>
           </p:cNvPr>
@@ -1216,7 +1216,7 @@
           <p:cNvPr id="4" name="日付プレースホルダー 3">
             <a:extLst>
               <a:ext uri="{FF2B5EF4-FFF2-40B4-BE49-F238E27FC236}">
-                <a16:creationId xmlns:a16="http://schemas.microsoft.com/office/drawing/2014/main" id="{54FE882E-A29F-8F82-D1BA-473CCC2B2363}"/>
+                <a16:creationId xmlns:a16="http://schemas.microsoft.com/office/drawing/2014/main" id="{DBD87963-FA62-D32E-52D2-E31021F7FD88}"/>
               </a:ext>
             </a:extLst>
           </p:cNvPr>
@@ -1232,7 +1232,7 @@
           <a:bodyPr/>
           <a:lstStyle/>
           <a:p>
-            <a:fld id="{26BAC62B-7712-4004-B83E-1B2BFE74FA4E}" type="datetimeFigureOut">
+            <a:fld id="{01DF3F40-F578-4070-8275-6AD5C9D05345}" type="datetimeFigureOut">
               <a:rPr kumimoji="1" lang="ja-JP" altLang="en-US" smtClean="0"/>
               <a:t>2026/7/30</a:t>
             </a:fld>
@@ -1245,7 +1245,7 @@
           <p:cNvPr id="5" name="フッター プレースホルダー 4">
             <a:extLst>
               <a:ext uri="{FF2B5EF4-FFF2-40B4-BE49-F238E27FC236}">
-                <a16:creationId xmlns:a16="http://schemas.microsoft.com/office/drawing/2014/main" id="{A8C676B0-9D00-477E-FA46-7DBDDE3B4AC2}"/>
+                <a16:creationId xmlns:a16="http://schemas.microsoft.com/office/drawing/2014/main" id="{D9F7B237-ED21-5159-DAD1-E51C7FD79AA4}"/>
               </a:ext>
             </a:extLst>
           </p:cNvPr>
@@ -1270,7 +1270,7 @@
           <p:cNvPr id="6" name="スライド番号プレースホルダー 5">
             <a:extLst>
               <a:ext uri="{FF2B5EF4-FFF2-40B4-BE49-F238E27FC236}">
-                <a16:creationId xmlns:a16="http://schemas.microsoft.com/office/drawing/2014/main" id="{EEA52C55-4A6B-E809-FA98-9E18FEBBAE7A}"/>
+                <a16:creationId xmlns:a16="http://schemas.microsoft.com/office/drawing/2014/main" id="{4A02D6E1-1E32-96CB-F767-2F5021E6085E}"/>
               </a:ext>
             </a:extLst>
           </p:cNvPr>
@@ -1286,7 +1286,7 @@
           <a:bodyPr/>
           <a:lstStyle/>
           <a:p>
-            <a:fld id="{28C83F49-008A-445D-8DBC-B105F38EDDDB}" type="slidenum">
+            <a:fld id="{F8D92D34-3AA4-4C1C-B030-5CB7F31C0DCF}" type="slidenum">
               <a:rPr kumimoji="1" lang="ja-JP" altLang="en-US" smtClean="0"/>
               <a:t>‹#›</a:t>
             </a:fld>
@@ -1297,7 +1297,7 @@
     </p:spTree>
     <p:extLst>
       <p:ext uri="{BB962C8B-B14F-4D97-AF65-F5344CB8AC3E}">
-        <p14:creationId xmlns:p14="http://schemas.microsoft.com/office/powerpoint/2010/main" val="3569967417"/>
+        <p14:creationId xmlns:p14="http://schemas.microsoft.com/office/powerpoint/2010/main" val="2949549573"/>
       </p:ext>
     </p:extLst>
   </p:cSld>
@@ -1329,7 +1329,7 @@
           <p:cNvPr id="2" name="タイトル 1">
             <a:extLst>
               <a:ext uri="{FF2B5EF4-FFF2-40B4-BE49-F238E27FC236}">
-                <a16:creationId xmlns:a16="http://schemas.microsoft.com/office/drawing/2014/main" id="{F02F288F-2CC3-8146-288F-07D3F65887FE}"/>
+                <a16:creationId xmlns:a16="http://schemas.microsoft.com/office/drawing/2014/main" id="{252A3590-1094-4D8C-031F-43168FB044CA}"/>
               </a:ext>
             </a:extLst>
           </p:cNvPr>
@@ -1357,7 +1357,7 @@
           <p:cNvPr id="3" name="コンテンツ プレースホルダー 2">
             <a:extLst>
               <a:ext uri="{FF2B5EF4-FFF2-40B4-BE49-F238E27FC236}">
-                <a16:creationId xmlns:a16="http://schemas.microsoft.com/office/drawing/2014/main" id="{839A5FAE-C49C-8617-7EEB-BFDE9859D87E}"/>
+                <a16:creationId xmlns:a16="http://schemas.microsoft.com/office/drawing/2014/main" id="{2942D5BC-488C-D1F3-5D13-B97D74B9D6EC}"/>
               </a:ext>
             </a:extLst>
           </p:cNvPr>
@@ -1451,7 +1451,7 @@
           <p:cNvPr id="4" name="コンテンツ プレースホルダー 3">
             <a:extLst>
               <a:ext uri="{FF2B5EF4-FFF2-40B4-BE49-F238E27FC236}">
-                <a16:creationId xmlns:a16="http://schemas.microsoft.com/office/drawing/2014/main" id="{B9B72339-2ECA-6FE9-2CA7-036C9313833E}"/>
+                <a16:creationId xmlns:a16="http://schemas.microsoft.com/office/drawing/2014/main" id="{D9A448E5-85DC-9E18-CDD8-F16FA420F73F}"/>
               </a:ext>
             </a:extLst>
           </p:cNvPr>
@@ -1545,7 +1545,7 @@
           <p:cNvPr id="5" name="日付プレースホルダー 4">
             <a:extLst>
               <a:ext uri="{FF2B5EF4-FFF2-40B4-BE49-F238E27FC236}">
-                <a16:creationId xmlns:a16="http://schemas.microsoft.com/office/drawing/2014/main" id="{D5F22837-6D08-BA3D-12F8-E0B769165691}"/>
+                <a16:creationId xmlns:a16="http://schemas.microsoft.com/office/drawing/2014/main" id="{9D01C416-24AF-A742-6B44-BC494BA265B8}"/>
               </a:ext>
             </a:extLst>
           </p:cNvPr>
@@ -1561,7 +1561,7 @@
           <a:bodyPr/>
           <a:lstStyle/>
           <a:p>
-            <a:fld id="{26BAC62B-7712-4004-B83E-1B2BFE74FA4E}" type="datetimeFigureOut">
+            <a:fld id="{01DF3F40-F578-4070-8275-6AD5C9D05345}" type="datetimeFigureOut">
               <a:rPr kumimoji="1" lang="ja-JP" altLang="en-US" smtClean="0"/>
               <a:t>2026/7/30</a:t>
             </a:fld>
@@ -1574,7 +1574,7 @@
           <p:cNvPr id="6" name="フッター プレースホルダー 5">
             <a:extLst>
               <a:ext uri="{FF2B5EF4-FFF2-40B4-BE49-F238E27FC236}">
-                <a16:creationId xmlns:a16="http://schemas.microsoft.com/office/drawing/2014/main" id="{B12EEB94-A65F-C7A4-D9CC-1C3CBBC8DD82}"/>
+                <a16:creationId xmlns:a16="http://schemas.microsoft.com/office/drawing/2014/main" id="{E0C452B8-0178-FB08-81D5-0A8297E3F8A2}"/>
               </a:ext>
             </a:extLst>
           </p:cNvPr>
@@ -1599,7 +1599,7 @@
           <p:cNvPr id="7" name="スライド番号プレースホルダー 6">
             <a:extLst>
               <a:ext uri="{FF2B5EF4-FFF2-40B4-BE49-F238E27FC236}">
-                <a16:creationId xmlns:a16="http://schemas.microsoft.com/office/drawing/2014/main" id="{62BF25FE-FA2D-B6D9-F0F3-E1CEA310C256}"/>
+                <a16:creationId xmlns:a16="http://schemas.microsoft.com/office/drawing/2014/main" id="{6A07FC42-D80F-1FF1-3252-04F5457C06DC}"/>
               </a:ext>
             </a:extLst>
           </p:cNvPr>
@@ -1615,7 +1615,7 @@
           <a:bodyPr/>
           <a:lstStyle/>
           <a:p>
-            <a:fld id="{28C83F49-008A-445D-8DBC-B105F38EDDDB}" type="slidenum">
+            <a:fld id="{F8D92D34-3AA4-4C1C-B030-5CB7F31C0DCF}" type="slidenum">
               <a:rPr kumimoji="1" lang="ja-JP" altLang="en-US" smtClean="0"/>
               <a:t>‹#›</a:t>
             </a:fld>
@@ -1626,7 +1626,7 @@
     </p:spTree>
     <p:extLst>
       <p:ext uri="{BB962C8B-B14F-4D97-AF65-F5344CB8AC3E}">
-        <p14:creationId xmlns:p14="http://schemas.microsoft.com/office/powerpoint/2010/main" val="500080800"/>
+        <p14:creationId xmlns:p14="http://schemas.microsoft.com/office/powerpoint/2010/main" val="2679245194"/>
       </p:ext>
     </p:extLst>
   </p:cSld>
@@ -1658,7 +1658,7 @@
           <p:cNvPr id="2" name="タイトル 1">
             <a:extLst>
               <a:ext uri="{FF2B5EF4-FFF2-40B4-BE49-F238E27FC236}">
-                <a16:creationId xmlns:a16="http://schemas.microsoft.com/office/drawing/2014/main" id="{AF02532F-FD96-7C1A-5E86-2E027669491B}"/>
+                <a16:creationId xmlns:a16="http://schemas.microsoft.com/office/drawing/2014/main" id="{6E6ED7C4-A63E-75D7-81C7-A98CEC95D266}"/>
               </a:ext>
             </a:extLst>
           </p:cNvPr>
@@ -1691,7 +1691,7 @@
           <p:cNvPr id="3" name="テキスト プレースホルダー 2">
             <a:extLst>
               <a:ext uri="{FF2B5EF4-FFF2-40B4-BE49-F238E27FC236}">
-                <a16:creationId xmlns:a16="http://schemas.microsoft.com/office/drawing/2014/main" id="{C43D8B15-6E15-4ED8-DAE5-A8591BEF4B78}"/>
+                <a16:creationId xmlns:a16="http://schemas.microsoft.com/office/drawing/2014/main" id="{A74D8017-2E2B-5D72-6153-E7BAF6CFC717}"/>
               </a:ext>
             </a:extLst>
           </p:cNvPr>
@@ -1762,7 +1762,7 @@
           <p:cNvPr id="4" name="コンテンツ プレースホルダー 3">
             <a:extLst>
               <a:ext uri="{FF2B5EF4-FFF2-40B4-BE49-F238E27FC236}">
-                <a16:creationId xmlns:a16="http://schemas.microsoft.com/office/drawing/2014/main" id="{7F5DEDF4-3FE9-861D-5065-CFB908E00F31}"/>
+                <a16:creationId xmlns:a16="http://schemas.microsoft.com/office/drawing/2014/main" id="{D5CFACFE-1C50-A5EE-731A-5608A87503AE}"/>
               </a:ext>
             </a:extLst>
           </p:cNvPr>
@@ -1856,7 +1856,7 @@
           <p:cNvPr id="5" name="テキスト プレースホルダー 4">
             <a:extLst>
               <a:ext uri="{FF2B5EF4-FFF2-40B4-BE49-F238E27FC236}">
-                <a16:creationId xmlns:a16="http://schemas.microsoft.com/office/drawing/2014/main" id="{4590DCFB-242B-0E44-ECB2-5834FB32FFA4}"/>
+                <a16:creationId xmlns:a16="http://schemas.microsoft.com/office/drawing/2014/main" id="{A3510BEA-0194-B81A-E5D7-87C07807C3FB}"/>
               </a:ext>
             </a:extLst>
           </p:cNvPr>
@@ -1927,7 +1927,7 @@
           <p:cNvPr id="6" name="コンテンツ プレースホルダー 5">
             <a:extLst>
               <a:ext uri="{FF2B5EF4-FFF2-40B4-BE49-F238E27FC236}">
-                <a16:creationId xmlns:a16="http://schemas.microsoft.com/office/drawing/2014/main" id="{DEDA4276-15F0-1137-88CE-EBD87CC3F715}"/>
+                <a16:creationId xmlns:a16="http://schemas.microsoft.com/office/drawing/2014/main" id="{8FC65B43-DBE8-105B-B8AB-CB84D66BB252}"/>
               </a:ext>
             </a:extLst>
           </p:cNvPr>
@@ -2021,7 +2021,7 @@
           <p:cNvPr id="7" name="日付プレースホルダー 6">
             <a:extLst>
               <a:ext uri="{FF2B5EF4-FFF2-40B4-BE49-F238E27FC236}">
-                <a16:creationId xmlns:a16="http://schemas.microsoft.com/office/drawing/2014/main" id="{B36E25BE-59BE-C906-85D6-4343AA04D3C2}"/>
+                <a16:creationId xmlns:a16="http://schemas.microsoft.com/office/drawing/2014/main" id="{CF66AB6E-C663-0FE3-F22E-0D7D05A75DA0}"/>
               </a:ext>
             </a:extLst>
           </p:cNvPr>
@@ -2037,7 +2037,7 @@
           <a:bodyPr/>
           <a:lstStyle/>
           <a:p>
-            <a:fld id="{26BAC62B-7712-4004-B83E-1B2BFE74FA4E}" type="datetimeFigureOut">
+            <a:fld id="{01DF3F40-F578-4070-8275-6AD5C9D05345}" type="datetimeFigureOut">
               <a:rPr kumimoji="1" lang="ja-JP" altLang="en-US" smtClean="0"/>
               <a:t>2026/7/30</a:t>
             </a:fld>
@@ -2050,7 +2050,7 @@
           <p:cNvPr id="8" name="フッター プレースホルダー 7">
             <a:extLst>
               <a:ext uri="{FF2B5EF4-FFF2-40B4-BE49-F238E27FC236}">
-                <a16:creationId xmlns:a16="http://schemas.microsoft.com/office/drawing/2014/main" id="{722AC674-7A1B-DE78-C80F-20D3F47F1F3E}"/>
+                <a16:creationId xmlns:a16="http://schemas.microsoft.com/office/drawing/2014/main" id="{4E5FDA64-6B9B-7453-D0D4-FC1ED70328C8}"/>
               </a:ext>
             </a:extLst>
           </p:cNvPr>
@@ -2075,7 +2075,7 @@
           <p:cNvPr id="9" name="スライド番号プレースホルダー 8">
             <a:extLst>
               <a:ext uri="{FF2B5EF4-FFF2-40B4-BE49-F238E27FC236}">
-                <a16:creationId xmlns:a16="http://schemas.microsoft.com/office/drawing/2014/main" id="{E182DC2A-5B86-8955-5D97-CF5A25C57A9C}"/>
+                <a16:creationId xmlns:a16="http://schemas.microsoft.com/office/drawing/2014/main" id="{5390FEB5-4551-2110-806C-C48114CB9CA4}"/>
               </a:ext>
             </a:extLst>
           </p:cNvPr>
@@ -2091,7 +2091,7 @@
           <a:bodyPr/>
           <a:lstStyle/>
           <a:p>
-            <a:fld id="{28C83F49-008A-445D-8DBC-B105F38EDDDB}" type="slidenum">
+            <a:fld id="{F8D92D34-3AA4-4C1C-B030-5CB7F31C0DCF}" type="slidenum">
               <a:rPr kumimoji="1" lang="ja-JP" altLang="en-US" smtClean="0"/>
               <a:t>‹#›</a:t>
             </a:fld>
@@ -2102,7 +2102,7 @@
     </p:spTree>
     <p:extLst>
       <p:ext uri="{BB962C8B-B14F-4D97-AF65-F5344CB8AC3E}">
-        <p14:creationId xmlns:p14="http://schemas.microsoft.com/office/powerpoint/2010/main" val="253869492"/>
+        <p14:creationId xmlns:p14="http://schemas.microsoft.com/office/powerpoint/2010/main" val="3909760803"/>
       </p:ext>
     </p:extLst>
   </p:cSld>
@@ -2134,7 +2134,7 @@
           <p:cNvPr id="2" name="タイトル 1">
             <a:extLst>
               <a:ext uri="{FF2B5EF4-FFF2-40B4-BE49-F238E27FC236}">
-                <a16:creationId xmlns:a16="http://schemas.microsoft.com/office/drawing/2014/main" id="{0135EC5B-3410-7F6A-82AD-D666AB0B1609}"/>
+                <a16:creationId xmlns:a16="http://schemas.microsoft.com/office/drawing/2014/main" id="{34B53663-9B96-BF8B-B061-3C913D09AED9}"/>
               </a:ext>
             </a:extLst>
           </p:cNvPr>
@@ -2162,7 +2162,7 @@
           <p:cNvPr id="3" name="日付プレースホルダー 2">
             <a:extLst>
               <a:ext uri="{FF2B5EF4-FFF2-40B4-BE49-F238E27FC236}">
-                <a16:creationId xmlns:a16="http://schemas.microsoft.com/office/drawing/2014/main" id="{A31BDA86-0D46-5371-28DA-67208A301657}"/>
+                <a16:creationId xmlns:a16="http://schemas.microsoft.com/office/drawing/2014/main" id="{E164D912-AB61-97AF-D2C9-C347FFA1EF8E}"/>
               </a:ext>
             </a:extLst>
           </p:cNvPr>
@@ -2178,7 +2178,7 @@
           <a:bodyPr/>
           <a:lstStyle/>
           <a:p>
-            <a:fld id="{26BAC62B-7712-4004-B83E-1B2BFE74FA4E}" type="datetimeFigureOut">
+            <a:fld id="{01DF3F40-F578-4070-8275-6AD5C9D05345}" type="datetimeFigureOut">
               <a:rPr kumimoji="1" lang="ja-JP" altLang="en-US" smtClean="0"/>
               <a:t>2026/7/30</a:t>
             </a:fld>
@@ -2191,7 +2191,7 @@
           <p:cNvPr id="4" name="フッター プレースホルダー 3">
             <a:extLst>
               <a:ext uri="{FF2B5EF4-FFF2-40B4-BE49-F238E27FC236}">
-                <a16:creationId xmlns:a16="http://schemas.microsoft.com/office/drawing/2014/main" id="{E43A0BB3-E000-866D-D310-166105CE20A5}"/>
+                <a16:creationId xmlns:a16="http://schemas.microsoft.com/office/drawing/2014/main" id="{01A45F26-1AA0-8EF0-20DB-12C5351F2E12}"/>
               </a:ext>
             </a:extLst>
           </p:cNvPr>
@@ -2216,7 +2216,7 @@
           <p:cNvPr id="5" name="スライド番号プレースホルダー 4">
             <a:extLst>
               <a:ext uri="{FF2B5EF4-FFF2-40B4-BE49-F238E27FC236}">
-                <a16:creationId xmlns:a16="http://schemas.microsoft.com/office/drawing/2014/main" id="{7789CE67-9580-6166-6AD2-43BECDDFA87A}"/>
+                <a16:creationId xmlns:a16="http://schemas.microsoft.com/office/drawing/2014/main" id="{9B3BD119-58FF-C8A8-D2EE-98190B08D8E3}"/>
               </a:ext>
             </a:extLst>
           </p:cNvPr>
@@ -2232,7 +2232,7 @@
           <a:bodyPr/>
           <a:lstStyle/>
           <a:p>
-            <a:fld id="{28C83F49-008A-445D-8DBC-B105F38EDDDB}" type="slidenum">
+            <a:fld id="{F8D92D34-3AA4-4C1C-B030-5CB7F31C0DCF}" type="slidenum">
               <a:rPr kumimoji="1" lang="ja-JP" altLang="en-US" smtClean="0"/>
               <a:t>‹#›</a:t>
             </a:fld>
@@ -2243,7 +2243,7 @@
     </p:spTree>
     <p:extLst>
       <p:ext uri="{BB962C8B-B14F-4D97-AF65-F5344CB8AC3E}">
-        <p14:creationId xmlns:p14="http://schemas.microsoft.com/office/powerpoint/2010/main" val="2421006826"/>
+        <p14:creationId xmlns:p14="http://schemas.microsoft.com/office/powerpoint/2010/main" val="294702458"/>
       </p:ext>
     </p:extLst>
   </p:cSld>
@@ -2275,7 +2275,7 @@
           <p:cNvPr id="2" name="日付プレースホルダー 1">
             <a:extLst>
               <a:ext uri="{FF2B5EF4-FFF2-40B4-BE49-F238E27FC236}">
-                <a16:creationId xmlns:a16="http://schemas.microsoft.com/office/drawing/2014/main" id="{11EB00AE-BB86-7601-C8EF-8582998DFCD4}"/>
+                <a16:creationId xmlns:a16="http://schemas.microsoft.com/office/drawing/2014/main" id="{34C3D619-9DCD-E52B-3721-BD9339047B16}"/>
               </a:ext>
             </a:extLst>
           </p:cNvPr>
@@ -2291,7 +2291,7 @@
           <a:bodyPr/>
           <a:lstStyle/>
           <a:p>
-            <a:fld id="{26BAC62B-7712-4004-B83E-1B2BFE74FA4E}" type="datetimeFigureOut">
+            <a:fld id="{01DF3F40-F578-4070-8275-6AD5C9D05345}" type="datetimeFigureOut">
               <a:rPr kumimoji="1" lang="ja-JP" altLang="en-US" smtClean="0"/>
               <a:t>2026/7/30</a:t>
             </a:fld>
@@ -2304,7 +2304,7 @@
           <p:cNvPr id="3" name="フッター プレースホルダー 2">
             <a:extLst>
               <a:ext uri="{FF2B5EF4-FFF2-40B4-BE49-F238E27FC236}">
-                <a16:creationId xmlns:a16="http://schemas.microsoft.com/office/drawing/2014/main" id="{A541505A-5B35-4E5C-B40E-193B941B619E}"/>
+                <a16:creationId xmlns:a16="http://schemas.microsoft.com/office/drawing/2014/main" id="{8D6153FD-0A03-FB3D-EE46-E7186E9449C8}"/>
               </a:ext>
             </a:extLst>
           </p:cNvPr>
@@ -2329,7 +2329,7 @@
           <p:cNvPr id="4" name="スライド番号プレースホルダー 3">
             <a:extLst>
               <a:ext uri="{FF2B5EF4-FFF2-40B4-BE49-F238E27FC236}">
-                <a16:creationId xmlns:a16="http://schemas.microsoft.com/office/drawing/2014/main" id="{1587C203-D144-185C-BF75-5BD3BFC30A33}"/>
+                <a16:creationId xmlns:a16="http://schemas.microsoft.com/office/drawing/2014/main" id="{2B54C7FB-C6B6-7AB9-9CA5-9725519AA025}"/>
               </a:ext>
             </a:extLst>
           </p:cNvPr>
@@ -2345,7 +2345,7 @@
           <a:bodyPr/>
           <a:lstStyle/>
           <a:p>
-            <a:fld id="{28C83F49-008A-445D-8DBC-B105F38EDDDB}" type="slidenum">
+            <a:fld id="{F8D92D34-3AA4-4C1C-B030-5CB7F31C0DCF}" type="slidenum">
               <a:rPr kumimoji="1" lang="ja-JP" altLang="en-US" smtClean="0"/>
               <a:t>‹#›</a:t>
             </a:fld>
@@ -2356,7 +2356,7 @@
     </p:spTree>
     <p:extLst>
       <p:ext uri="{BB962C8B-B14F-4D97-AF65-F5344CB8AC3E}">
-        <p14:creationId xmlns:p14="http://schemas.microsoft.com/office/powerpoint/2010/main" val="1535156218"/>
+        <p14:creationId xmlns:p14="http://schemas.microsoft.com/office/powerpoint/2010/main" val="1218273916"/>
       </p:ext>
     </p:extLst>
   </p:cSld>
@@ -2388,7 +2388,7 @@
           <p:cNvPr id="2" name="タイトル 1">
             <a:extLst>
               <a:ext uri="{FF2B5EF4-FFF2-40B4-BE49-F238E27FC236}">
-                <a16:creationId xmlns:a16="http://schemas.microsoft.com/office/drawing/2014/main" id="{9023861B-09D3-8680-684D-8F60B4F06021}"/>
+                <a16:creationId xmlns:a16="http://schemas.microsoft.com/office/drawing/2014/main" id="{17CEC9E3-5372-91B1-33FF-4E5317D3C594}"/>
               </a:ext>
             </a:extLst>
           </p:cNvPr>
@@ -2425,7 +2425,7 @@
           <p:cNvPr id="3" name="コンテンツ プレースホルダー 2">
             <a:extLst>
               <a:ext uri="{FF2B5EF4-FFF2-40B4-BE49-F238E27FC236}">
-                <a16:creationId xmlns:a16="http://schemas.microsoft.com/office/drawing/2014/main" id="{C009040A-E59B-6C86-859B-24765F2BD05D}"/>
+                <a16:creationId xmlns:a16="http://schemas.microsoft.com/office/drawing/2014/main" id="{761E86B3-4698-7B6D-1150-B420A03E3645}"/>
               </a:ext>
             </a:extLst>
           </p:cNvPr>
@@ -2547,7 +2547,7 @@
           <p:cNvPr id="4" name="テキスト プレースホルダー 3">
             <a:extLst>
               <a:ext uri="{FF2B5EF4-FFF2-40B4-BE49-F238E27FC236}">
-                <a16:creationId xmlns:a16="http://schemas.microsoft.com/office/drawing/2014/main" id="{12FF531F-CF1E-0202-F9E3-7DE6C5D952AA}"/>
+                <a16:creationId xmlns:a16="http://schemas.microsoft.com/office/drawing/2014/main" id="{4B98362F-222F-D967-AFE4-BFC118642E80}"/>
               </a:ext>
             </a:extLst>
           </p:cNvPr>
@@ -2618,7 +2618,7 @@
           <p:cNvPr id="5" name="日付プレースホルダー 4">
             <a:extLst>
               <a:ext uri="{FF2B5EF4-FFF2-40B4-BE49-F238E27FC236}">
-                <a16:creationId xmlns:a16="http://schemas.microsoft.com/office/drawing/2014/main" id="{712641D9-1A8A-BC4D-524E-5E7C457F82E4}"/>
+                <a16:creationId xmlns:a16="http://schemas.microsoft.com/office/drawing/2014/main" id="{44C63BE0-4D6D-4B62-DA54-810D6C33626C}"/>
               </a:ext>
             </a:extLst>
           </p:cNvPr>
@@ -2634,7 +2634,7 @@
           <a:bodyPr/>
           <a:lstStyle/>
           <a:p>
-            <a:fld id="{26BAC62B-7712-4004-B83E-1B2BFE74FA4E}" type="datetimeFigureOut">
+            <a:fld id="{01DF3F40-F578-4070-8275-6AD5C9D05345}" type="datetimeFigureOut">
               <a:rPr kumimoji="1" lang="ja-JP" altLang="en-US" smtClean="0"/>
               <a:t>2026/7/30</a:t>
             </a:fld>
@@ -2647,7 +2647,7 @@
           <p:cNvPr id="6" name="フッター プレースホルダー 5">
             <a:extLst>
               <a:ext uri="{FF2B5EF4-FFF2-40B4-BE49-F238E27FC236}">
-                <a16:creationId xmlns:a16="http://schemas.microsoft.com/office/drawing/2014/main" id="{86AEF330-E9CD-23AC-A964-AB23D18E156B}"/>
+                <a16:creationId xmlns:a16="http://schemas.microsoft.com/office/drawing/2014/main" id="{814FCD19-6EA5-3B42-95F6-FFE1D4C63510}"/>
               </a:ext>
             </a:extLst>
           </p:cNvPr>
@@ -2672,7 +2672,7 @@
           <p:cNvPr id="7" name="スライド番号プレースホルダー 6">
             <a:extLst>
               <a:ext uri="{FF2B5EF4-FFF2-40B4-BE49-F238E27FC236}">
-                <a16:creationId xmlns:a16="http://schemas.microsoft.com/office/drawing/2014/main" id="{A84C18B2-3322-5E59-0062-999280C69A71}"/>
+                <a16:creationId xmlns:a16="http://schemas.microsoft.com/office/drawing/2014/main" id="{040DF0EF-35CB-8A15-2507-FC4161CA9DBF}"/>
               </a:ext>
             </a:extLst>
           </p:cNvPr>
@@ -2688,7 +2688,7 @@
           <a:bodyPr/>
           <a:lstStyle/>
           <a:p>
-            <a:fld id="{28C83F49-008A-445D-8DBC-B105F38EDDDB}" type="slidenum">
+            <a:fld id="{F8D92D34-3AA4-4C1C-B030-5CB7F31C0DCF}" type="slidenum">
               <a:rPr kumimoji="1" lang="ja-JP" altLang="en-US" smtClean="0"/>
               <a:t>‹#›</a:t>
             </a:fld>
@@ -2699,7 +2699,7 @@
     </p:spTree>
     <p:extLst>
       <p:ext uri="{BB962C8B-B14F-4D97-AF65-F5344CB8AC3E}">
-        <p14:creationId xmlns:p14="http://schemas.microsoft.com/office/powerpoint/2010/main" val="1365441792"/>
+        <p14:creationId xmlns:p14="http://schemas.microsoft.com/office/powerpoint/2010/main" val="1595632148"/>
       </p:ext>
     </p:extLst>
   </p:cSld>
@@ -2731,7 +2731,7 @@
           <p:cNvPr id="2" name="タイトル 1">
             <a:extLst>
               <a:ext uri="{FF2B5EF4-FFF2-40B4-BE49-F238E27FC236}">
-                <a16:creationId xmlns:a16="http://schemas.microsoft.com/office/drawing/2014/main" id="{9748FB00-F81A-B980-CC6B-4A94C2F9BDF3}"/>
+                <a16:creationId xmlns:a16="http://schemas.microsoft.com/office/drawing/2014/main" id="{C1F1DF0F-9543-9640-6760-4DA23150DA99}"/>
               </a:ext>
             </a:extLst>
           </p:cNvPr>
@@ -2768,7 +2768,7 @@
           <p:cNvPr id="3" name="図プレースホルダー 2">
             <a:extLst>
               <a:ext uri="{FF2B5EF4-FFF2-40B4-BE49-F238E27FC236}">
-                <a16:creationId xmlns:a16="http://schemas.microsoft.com/office/drawing/2014/main" id="{04DCB2A8-3AB4-F898-D824-553ADD39A867}"/>
+                <a16:creationId xmlns:a16="http://schemas.microsoft.com/office/drawing/2014/main" id="{8DA0E4AD-99DF-7A53-F6EF-78F4A79609D5}"/>
               </a:ext>
             </a:extLst>
           </p:cNvPr>
@@ -2835,7 +2835,7 @@
           <p:cNvPr id="4" name="テキスト プレースホルダー 3">
             <a:extLst>
               <a:ext uri="{FF2B5EF4-FFF2-40B4-BE49-F238E27FC236}">
-                <a16:creationId xmlns:a16="http://schemas.microsoft.com/office/drawing/2014/main" id="{BE37105C-041C-DD7F-305F-490879AB8E23}"/>
+                <a16:creationId xmlns:a16="http://schemas.microsoft.com/office/drawing/2014/main" id="{1318FF6E-EA9C-5A53-C6AB-03C23E37DEC3}"/>
               </a:ext>
             </a:extLst>
           </p:cNvPr>
@@ -2906,7 +2906,7 @@
           <p:cNvPr id="5" name="日付プレースホルダー 4">
             <a:extLst>
               <a:ext uri="{FF2B5EF4-FFF2-40B4-BE49-F238E27FC236}">
-                <a16:creationId xmlns:a16="http://schemas.microsoft.com/office/drawing/2014/main" id="{BBEE0BD8-DC91-C437-377F-2BAB9E560279}"/>
+                <a16:creationId xmlns:a16="http://schemas.microsoft.com/office/drawing/2014/main" id="{ED02357F-844D-09C5-0EDA-6EC3546B1D1C}"/>
               </a:ext>
             </a:extLst>
           </p:cNvPr>
@@ -2922,7 +2922,7 @@
           <a:bodyPr/>
           <a:lstStyle/>
           <a:p>
-            <a:fld id="{26BAC62B-7712-4004-B83E-1B2BFE74FA4E}" type="datetimeFigureOut">
+            <a:fld id="{01DF3F40-F578-4070-8275-6AD5C9D05345}" type="datetimeFigureOut">
               <a:rPr kumimoji="1" lang="ja-JP" altLang="en-US" smtClean="0"/>
               <a:t>2026/7/30</a:t>
             </a:fld>
@@ -2935,7 +2935,7 @@
           <p:cNvPr id="6" name="フッター プレースホルダー 5">
             <a:extLst>
               <a:ext uri="{FF2B5EF4-FFF2-40B4-BE49-F238E27FC236}">
-                <a16:creationId xmlns:a16="http://schemas.microsoft.com/office/drawing/2014/main" id="{D2B6B224-FD4A-69FF-7396-5D2FDC528CDA}"/>
+                <a16:creationId xmlns:a16="http://schemas.microsoft.com/office/drawing/2014/main" id="{7CA3A7E8-846D-908E-0064-872A246E4CA5}"/>
               </a:ext>
             </a:extLst>
           </p:cNvPr>
@@ -2960,7 +2960,7 @@
           <p:cNvPr id="7" name="スライド番号プレースホルダー 6">
             <a:extLst>
               <a:ext uri="{FF2B5EF4-FFF2-40B4-BE49-F238E27FC236}">
-                <a16:creationId xmlns:a16="http://schemas.microsoft.com/office/drawing/2014/main" id="{37D37B3C-0CD1-F0D2-422A-B1C55D1A2F2B}"/>
+                <a16:creationId xmlns:a16="http://schemas.microsoft.com/office/drawing/2014/main" id="{5CDF0080-192A-91AB-B1E5-09C9D5DB703A}"/>
               </a:ext>
             </a:extLst>
           </p:cNvPr>
@@ -2976,7 +2976,7 @@
           <a:bodyPr/>
           <a:lstStyle/>
           <a:p>
-            <a:fld id="{28C83F49-008A-445D-8DBC-B105F38EDDDB}" type="slidenum">
+            <a:fld id="{F8D92D34-3AA4-4C1C-B030-5CB7F31C0DCF}" type="slidenum">
               <a:rPr kumimoji="1" lang="ja-JP" altLang="en-US" smtClean="0"/>
               <a:t>‹#›</a:t>
             </a:fld>
@@ -2987,7 +2987,7 @@
     </p:spTree>
     <p:extLst>
       <p:ext uri="{BB962C8B-B14F-4D97-AF65-F5344CB8AC3E}">
-        <p14:creationId xmlns:p14="http://schemas.microsoft.com/office/powerpoint/2010/main" val="3383789448"/>
+        <p14:creationId xmlns:p14="http://schemas.microsoft.com/office/powerpoint/2010/main" val="1739148250"/>
       </p:ext>
     </p:extLst>
   </p:cSld>
@@ -3024,7 +3024,7 @@
           <p:cNvPr id="2" name="タイトル プレースホルダー 1">
             <a:extLst>
               <a:ext uri="{FF2B5EF4-FFF2-40B4-BE49-F238E27FC236}">
-                <a16:creationId xmlns:a16="http://schemas.microsoft.com/office/drawing/2014/main" id="{DFAED143-C4EE-EB17-48DD-154EB1D71C61}"/>
+                <a16:creationId xmlns:a16="http://schemas.microsoft.com/office/drawing/2014/main" id="{2C83126E-E00F-A552-617B-FF4C6ABB7DD9}"/>
               </a:ext>
             </a:extLst>
           </p:cNvPr>
@@ -3062,7 +3062,7 @@
           <p:cNvPr id="3" name="テキスト プレースホルダー 2">
             <a:extLst>
               <a:ext uri="{FF2B5EF4-FFF2-40B4-BE49-F238E27FC236}">
-                <a16:creationId xmlns:a16="http://schemas.microsoft.com/office/drawing/2014/main" id="{52B963D6-EB45-991D-8AB2-BD054D43901D}"/>
+                <a16:creationId xmlns:a16="http://schemas.microsoft.com/office/drawing/2014/main" id="{A10149E7-31F7-131B-98D7-F1EE041BC77D}"/>
               </a:ext>
             </a:extLst>
           </p:cNvPr>
@@ -3161,7 +3161,7 @@
           <p:cNvPr id="4" name="日付プレースホルダー 3">
             <a:extLst>
               <a:ext uri="{FF2B5EF4-FFF2-40B4-BE49-F238E27FC236}">
-                <a16:creationId xmlns:a16="http://schemas.microsoft.com/office/drawing/2014/main" id="{6C18AC5C-81C5-2291-94B9-2BA1B3C41D87}"/>
+                <a16:creationId xmlns:a16="http://schemas.microsoft.com/office/drawing/2014/main" id="{615BD16D-379D-9D3D-2D33-E092744E8D22}"/>
               </a:ext>
             </a:extLst>
           </p:cNvPr>
@@ -3195,7 +3195,7 @@
             </a:lvl1pPr>
           </a:lstStyle>
           <a:p>
-            <a:fld id="{26BAC62B-7712-4004-B83E-1B2BFE74FA4E}" type="datetimeFigureOut">
+            <a:fld id="{01DF3F40-F578-4070-8275-6AD5C9D05345}" type="datetimeFigureOut">
               <a:rPr kumimoji="1" lang="ja-JP" altLang="en-US" smtClean="0"/>
               <a:t>2026/7/30</a:t>
             </a:fld>
@@ -3208,7 +3208,7 @@
           <p:cNvPr id="5" name="フッター プレースホルダー 4">
             <a:extLst>
               <a:ext uri="{FF2B5EF4-FFF2-40B4-BE49-F238E27FC236}">
-                <a16:creationId xmlns:a16="http://schemas.microsoft.com/office/drawing/2014/main" id="{FF67DD32-6878-AF3A-4977-BBB4E7427195}"/>
+                <a16:creationId xmlns:a16="http://schemas.microsoft.com/office/drawing/2014/main" id="{B5EB0BC6-5DCE-1A88-C55A-983BB02089C8}"/>
               </a:ext>
             </a:extLst>
           </p:cNvPr>
@@ -3251,7 +3251,7 @@
           <p:cNvPr id="6" name="スライド番号プレースホルダー 5">
             <a:extLst>
               <a:ext uri="{FF2B5EF4-FFF2-40B4-BE49-F238E27FC236}">
-                <a16:creationId xmlns:a16="http://schemas.microsoft.com/office/drawing/2014/main" id="{8D844C84-868F-26BC-EF2E-90D0216468FF}"/>
+                <a16:creationId xmlns:a16="http://schemas.microsoft.com/office/drawing/2014/main" id="{E71ABA2D-1041-AFAC-D143-A68754FDAE9A}"/>
               </a:ext>
             </a:extLst>
           </p:cNvPr>
@@ -3285,7 +3285,7 @@
             </a:lvl1pPr>
           </a:lstStyle>
           <a:p>
-            <a:fld id="{28C83F49-008A-445D-8DBC-B105F38EDDDB}" type="slidenum">
+            <a:fld id="{F8D92D34-3AA4-4C1C-B030-5CB7F31C0DCF}" type="slidenum">
               <a:rPr kumimoji="1" lang="ja-JP" altLang="en-US" smtClean="0"/>
               <a:t>‹#›</a:t>
             </a:fld>
@@ -3296,7 +3296,7 @@
     </p:spTree>
     <p:extLst>
       <p:ext uri="{BB962C8B-B14F-4D97-AF65-F5344CB8AC3E}">
-        <p14:creationId xmlns:p14="http://schemas.microsoft.com/office/powerpoint/2010/main" val="621884923"/>
+        <p14:creationId xmlns:p14="http://schemas.microsoft.com/office/powerpoint/2010/main" val="1265877528"/>
       </p:ext>
     </p:extLst>
   </p:cSld>
@@ -3619,7 +3619,7 @@
           <p:cNvPr id="2" name="テキスト ボックス 1">
             <a:extLst>
               <a:ext uri="{FF2B5EF4-FFF2-40B4-BE49-F238E27FC236}">
-                <a16:creationId xmlns:a16="http://schemas.microsoft.com/office/drawing/2014/main" id="{F6306990-D5FB-A751-D724-6346FA68BA2E}"/>
+                <a16:creationId xmlns:a16="http://schemas.microsoft.com/office/drawing/2014/main" id="{8D2AAB65-5CFE-DE08-1691-EE9CA2BF16D7}"/>
               </a:ext>
             </a:extLst>
           </p:cNvPr>
@@ -3665,7 +3665,7 @@
           <p:cNvPr id="3" name="テキスト ボックス 2">
             <a:extLst>
               <a:ext uri="{FF2B5EF4-FFF2-40B4-BE49-F238E27FC236}">
-                <a16:creationId xmlns:a16="http://schemas.microsoft.com/office/drawing/2014/main" id="{A7D7FE57-9C7D-90DE-B6BA-95520634F4FE}"/>
+                <a16:creationId xmlns:a16="http://schemas.microsoft.com/office/drawing/2014/main" id="{00E094AC-9799-2FCF-0994-AA0DBB6CC8B1}"/>
               </a:ext>
             </a:extLst>
           </p:cNvPr>
@@ -3695,14 +3695,17 @@
                 </a:solidFill>
                 <a:latin typeface="Arial" panose="020B0604020202020204" pitchFamily="34" charset="0"/>
               </a:rPr>
-              <a:t>allbowl01 TECH EXPLANATION</a:t>
-            </a:r>
-            <a:endParaRPr kumimoji="1" lang="ja-JP" altLang="en-US" sz="3400" b="1">
-              <a:solidFill>
-                <a:srgbClr val="111111"/>
-              </a:solidFill>
-              <a:latin typeface="Arial" panose="020B0604020202020204" pitchFamily="34" charset="0"/>
-            </a:endParaRPr>
+              <a:t>Allbowl01</a:t>
+            </a:r>
+            <a:r>
+              <a:rPr kumimoji="1" lang="ja-JP" altLang="en-US" sz="3400" b="1">
+                <a:solidFill>
+                  <a:srgbClr val="111111"/>
+                </a:solidFill>
+                <a:latin typeface="Arial" panose="020B0604020202020204" pitchFamily="34" charset="0"/>
+              </a:rPr>
+              <a:t>の技術解説</a:t>
+            </a:r>
           </a:p>
         </p:txBody>
       </p:sp>
@@ -3711,7 +3714,7 @@
           <p:cNvPr id="4" name="テキスト ボックス 3">
             <a:extLst>
               <a:ext uri="{FF2B5EF4-FFF2-40B4-BE49-F238E27FC236}">
-                <a16:creationId xmlns:a16="http://schemas.microsoft.com/office/drawing/2014/main" id="{A325E5A0-893A-2B1A-41E2-0336D9F59F27}"/>
+                <a16:creationId xmlns:a16="http://schemas.microsoft.com/office/drawing/2014/main" id="{D1A626B1-9218-645C-183A-85B841CF4497}"/>
               </a:ext>
             </a:extLst>
           </p:cNvPr>
@@ -3735,20 +3738,14 @@
           <a:lstStyle/>
           <a:p>
             <a:r>
-              <a:rPr kumimoji="1" lang="en-US" altLang="ja-JP" sz="2000">
+              <a:rPr kumimoji="1" lang="ja-JP" altLang="en-US" sz="2000">
                 <a:solidFill>
                   <a:srgbClr val="333333"/>
                 </a:solidFill>
                 <a:latin typeface="Arial" panose="020B0604020202020204" pitchFamily="34" charset="0"/>
               </a:rPr>
-              <a:t>Architecture, implementation and commit history in 75 seconds</a:t>
-            </a:r>
-            <a:endParaRPr kumimoji="1" lang="ja-JP" altLang="en-US" sz="2000">
-              <a:solidFill>
-                <a:srgbClr val="333333"/>
-              </a:solidFill>
-              <a:latin typeface="Arial" panose="020B0604020202020204" pitchFamily="34" charset="0"/>
-            </a:endParaRPr>
+              <a:t>設計・実装・コミットから学ぶ短時間プレビュー</a:t>
+            </a:r>
           </a:p>
         </p:txBody>
       </p:sp>
@@ -3757,7 +3754,7 @@
           <p:cNvPr id="5" name="テキスト ボックス 4">
             <a:extLst>
               <a:ext uri="{FF2B5EF4-FFF2-40B4-BE49-F238E27FC236}">
-                <a16:creationId xmlns:a16="http://schemas.microsoft.com/office/drawing/2014/main" id="{84B55598-1BC2-69E6-032C-A8259C314E89}"/>
+                <a16:creationId xmlns:a16="http://schemas.microsoft.com/office/drawing/2014/main" id="{40D04957-B48A-826C-4FDE-3CBF1850374C}"/>
               </a:ext>
             </a:extLst>
           </p:cNvPr>
@@ -3804,7 +3801,7 @@
             <a:hlinkClick r:id="" action="ppaction://media"/>
             <a:extLst>
               <a:ext uri="{FF2B5EF4-FFF2-40B4-BE49-F238E27FC236}">
-                <a16:creationId xmlns:a16="http://schemas.microsoft.com/office/drawing/2014/main" id="{F5876B12-3850-CAF3-0FA7-C99C28A6DD93}"/>
+                <a16:creationId xmlns:a16="http://schemas.microsoft.com/office/drawing/2014/main" id="{E9104193-3814-9C90-1F46-909392734925}"/>
               </a:ext>
             </a:extLst>
           </p:cNvPr>
@@ -3839,7 +3836,7 @@
     </p:spTree>
     <p:extLst>
       <p:ext uri="{BB962C8B-B14F-4D97-AF65-F5344CB8AC3E}">
-        <p14:creationId xmlns:p14="http://schemas.microsoft.com/office/powerpoint/2010/main" val="507340496"/>
+        <p14:creationId xmlns:p14="http://schemas.microsoft.com/office/powerpoint/2010/main" val="2977110953"/>
       </p:ext>
     </p:extLst>
   </p:cSld>
@@ -3963,7 +3960,7 @@
           <p:cNvPr id="2" name="テキスト ボックス 1">
             <a:extLst>
               <a:ext uri="{FF2B5EF4-FFF2-40B4-BE49-F238E27FC236}">
-                <a16:creationId xmlns:a16="http://schemas.microsoft.com/office/drawing/2014/main" id="{6E855900-08A4-BF73-C6A6-88A7BAB180D1}"/>
+                <a16:creationId xmlns:a16="http://schemas.microsoft.com/office/drawing/2014/main" id="{B3568C6D-AAC1-62E5-D4C2-29DA4ADA2005}"/>
               </a:ext>
             </a:extLst>
           </p:cNvPr>
@@ -4009,7 +4006,7 @@
           <p:cNvPr id="3" name="テキスト ボックス 2">
             <a:extLst>
               <a:ext uri="{FF2B5EF4-FFF2-40B4-BE49-F238E27FC236}">
-                <a16:creationId xmlns:a16="http://schemas.microsoft.com/office/drawing/2014/main" id="{F3BC68F3-CB84-61D5-489B-DD84F791C514}"/>
+                <a16:creationId xmlns:a16="http://schemas.microsoft.com/office/drawing/2014/main" id="{A72ED76A-B100-E851-F2E4-BFF7851E6722}"/>
               </a:ext>
             </a:extLst>
           </p:cNvPr>
@@ -4033,20 +4030,14 @@
           <a:lstStyle/>
           <a:p>
             <a:r>
-              <a:rPr kumimoji="1" lang="en-US" altLang="ja-JP" sz="3400" b="1">
+              <a:rPr kumimoji="1" lang="ja-JP" altLang="en-US" sz="3400" b="1">
                 <a:solidFill>
                   <a:srgbClr val="111111"/>
                 </a:solidFill>
                 <a:latin typeface="Arial" panose="020B0604020202020204" pitchFamily="34" charset="0"/>
               </a:rPr>
-              <a:t>WHAT DOES IT SOLVE?</a:t>
-            </a:r>
-            <a:endParaRPr kumimoji="1" lang="ja-JP" altLang="en-US" sz="3400" b="1">
-              <a:solidFill>
-                <a:srgbClr val="111111"/>
-              </a:solidFill>
-              <a:latin typeface="Arial" panose="020B0604020202020204" pitchFamily="34" charset="0"/>
-            </a:endParaRPr>
+              <a:t>このプロジェクトは何を解決する？</a:t>
+            </a:r>
           </a:p>
         </p:txBody>
       </p:sp>
@@ -4055,7 +4046,7 @@
           <p:cNvPr id="4" name="テキスト ボックス 3">
             <a:extLst>
               <a:ext uri="{FF2B5EF4-FFF2-40B4-BE49-F238E27FC236}">
-                <a16:creationId xmlns:a16="http://schemas.microsoft.com/office/drawing/2014/main" id="{483D2232-295E-F808-D1B2-55ADB39F7D0C}"/>
+                <a16:creationId xmlns:a16="http://schemas.microsoft.com/office/drawing/2014/main" id="{384FED78-38E9-0BE0-69C9-C52C55BB7F5E}"/>
               </a:ext>
             </a:extLst>
           </p:cNvPr>
@@ -4104,7 +4095,7 @@
           <p:cNvPr id="5" name="テキスト ボックス 4">
             <a:extLst>
               <a:ext uri="{FF2B5EF4-FFF2-40B4-BE49-F238E27FC236}">
-                <a16:creationId xmlns:a16="http://schemas.microsoft.com/office/drawing/2014/main" id="{9AB362E5-E041-F4CF-43E8-C23474E35DD1}"/>
+                <a16:creationId xmlns:a16="http://schemas.microsoft.com/office/drawing/2014/main" id="{AC470692-2666-7646-AAAD-C4A2BE08BDA8}"/>
               </a:ext>
             </a:extLst>
           </p:cNvPr>
@@ -4151,7 +4142,7 @@
             <a:hlinkClick r:id="" action="ppaction://media"/>
             <a:extLst>
               <a:ext uri="{FF2B5EF4-FFF2-40B4-BE49-F238E27FC236}">
-                <a16:creationId xmlns:a16="http://schemas.microsoft.com/office/drawing/2014/main" id="{2D2B0B64-BAEC-34F6-DE65-E881F8DA49E2}"/>
+                <a16:creationId xmlns:a16="http://schemas.microsoft.com/office/drawing/2014/main" id="{9AF5CE59-0F5E-1A73-08C2-AF9E06D42D56}"/>
               </a:ext>
             </a:extLst>
           </p:cNvPr>
@@ -4186,7 +4177,7 @@
     </p:spTree>
     <p:extLst>
       <p:ext uri="{BB962C8B-B14F-4D97-AF65-F5344CB8AC3E}">
-        <p14:creationId xmlns:p14="http://schemas.microsoft.com/office/powerpoint/2010/main" val="774522481"/>
+        <p14:creationId xmlns:p14="http://schemas.microsoft.com/office/powerpoint/2010/main" val="1037981212"/>
       </p:ext>
     </p:extLst>
   </p:cSld>
@@ -4310,7 +4301,7 @@
           <p:cNvPr id="2" name="テキスト ボックス 1">
             <a:extLst>
               <a:ext uri="{FF2B5EF4-FFF2-40B4-BE49-F238E27FC236}">
-                <a16:creationId xmlns:a16="http://schemas.microsoft.com/office/drawing/2014/main" id="{433978A4-7E54-48CA-4E7A-C1E58E83F645}"/>
+                <a16:creationId xmlns:a16="http://schemas.microsoft.com/office/drawing/2014/main" id="{6189DEDA-1774-C3EF-D625-7C96A5CDAAC9}"/>
               </a:ext>
             </a:extLst>
           </p:cNvPr>
@@ -4356,7 +4347,7 @@
           <p:cNvPr id="3" name="テキスト ボックス 2">
             <a:extLst>
               <a:ext uri="{FF2B5EF4-FFF2-40B4-BE49-F238E27FC236}">
-                <a16:creationId xmlns:a16="http://schemas.microsoft.com/office/drawing/2014/main" id="{074EA0B3-1BB5-804B-DADA-5B9706250E36}"/>
+                <a16:creationId xmlns:a16="http://schemas.microsoft.com/office/drawing/2014/main" id="{9731039E-B997-E892-2B26-B5F24D528EC0}"/>
               </a:ext>
             </a:extLst>
           </p:cNvPr>
@@ -4380,20 +4371,14 @@
           <a:lstStyle/>
           <a:p>
             <a:r>
-              <a:rPr kumimoji="1" lang="en-US" altLang="ja-JP" sz="3400" b="1">
+              <a:rPr kumimoji="1" lang="ja-JP" altLang="en-US" sz="3400" b="1">
                 <a:solidFill>
                   <a:srgbClr val="111111"/>
                 </a:solidFill>
                 <a:latin typeface="Arial" panose="020B0604020202020204" pitchFamily="34" charset="0"/>
               </a:rPr>
-              <a:t>TECH STACK</a:t>
-            </a:r>
-            <a:endParaRPr kumimoji="1" lang="ja-JP" altLang="en-US" sz="3400" b="1">
-              <a:solidFill>
-                <a:srgbClr val="111111"/>
-              </a:solidFill>
-              <a:latin typeface="Arial" panose="020B0604020202020204" pitchFamily="34" charset="0"/>
-            </a:endParaRPr>
+              <a:t>技術スタック</a:t>
+            </a:r>
           </a:p>
         </p:txBody>
       </p:sp>
@@ -4402,7 +4387,7 @@
           <p:cNvPr id="4" name="テキスト ボックス 3">
             <a:extLst>
               <a:ext uri="{FF2B5EF4-FFF2-40B4-BE49-F238E27FC236}">
-                <a16:creationId xmlns:a16="http://schemas.microsoft.com/office/drawing/2014/main" id="{4FAA26BA-D18F-0677-DA9F-BF81FCD28D4F}"/>
+                <a16:creationId xmlns:a16="http://schemas.microsoft.com/office/drawing/2014/main" id="{64A0E048-79C4-4F4A-5CA4-CCD939E8DDDB}"/>
               </a:ext>
             </a:extLst>
           </p:cNvPr>
@@ -4412,7 +4397,7 @@
         <p:spPr>
           <a:xfrm>
             <a:off x="533400" y="3429000"/>
-            <a:ext cx="10795000" cy="400110"/>
+            <a:ext cx="10795000" cy="707886"/>
           </a:xfrm>
           <a:prstGeom prst="rect">
             <a:avLst/>
@@ -4426,13 +4411,22 @@
           <a:lstStyle/>
           <a:p>
             <a:r>
+              <a:rPr kumimoji="1" lang="ja-JP" altLang="en-US" sz="2000">
+                <a:solidFill>
+                  <a:srgbClr val="333333"/>
+                </a:solidFill>
+                <a:latin typeface="Arial" panose="020B0604020202020204" pitchFamily="34" charset="0"/>
+              </a:rPr>
+              <a:t>主要技術：</a:t>
+            </a:r>
+            <a:r>
               <a:rPr kumimoji="1" lang="en-US" altLang="ja-JP" sz="2000">
                 <a:solidFill>
                   <a:srgbClr val="333333"/>
                 </a:solidFill>
                 <a:latin typeface="Arial" panose="020B0604020202020204" pitchFamily="34" charset="0"/>
               </a:rPr>
-              <a:t>Primary technologies: C#</a:t>
+              <a:t>C#</a:t>
             </a:r>
             <a:r>
               <a:rPr kumimoji="1" lang="ja-JP" altLang="en-US" sz="2000">
@@ -4522,14 +4516,18 @@
                 </a:solidFill>
                 <a:latin typeface="Arial" panose="020B0604020202020204" pitchFamily="34" charset="0"/>
               </a:rPr>
-              <a:t>CSS</a:t>
-            </a:r>
-            <a:endParaRPr kumimoji="1" lang="ja-JP" altLang="en-US" sz="2000">
-              <a:solidFill>
-                <a:srgbClr val="333333"/>
-              </a:solidFill>
-              <a:latin typeface="Arial" panose="020B0604020202020204" pitchFamily="34" charset="0"/>
-            </a:endParaRPr>
+              <a:t>CSS
+</a:t>
+            </a:r>
+            <a:r>
+              <a:rPr kumimoji="1" lang="ja-JP" altLang="en-US" sz="2000">
+                <a:solidFill>
+                  <a:srgbClr val="333333"/>
+                </a:solidFill>
+                <a:latin typeface="Arial" panose="020B0604020202020204" pitchFamily="34" charset="0"/>
+              </a:rPr>
+              <a:t>役割を分け、保守しやすい構成を目指しています。</a:t>
+            </a:r>
           </a:p>
         </p:txBody>
       </p:sp>
@@ -4538,7 +4536,7 @@
           <p:cNvPr id="5" name="テキスト ボックス 4">
             <a:extLst>
               <a:ext uri="{FF2B5EF4-FFF2-40B4-BE49-F238E27FC236}">
-                <a16:creationId xmlns:a16="http://schemas.microsoft.com/office/drawing/2014/main" id="{67019115-698C-B8B5-D1E4-90ED5F7393A9}"/>
+                <a16:creationId xmlns:a16="http://schemas.microsoft.com/office/drawing/2014/main" id="{050D687A-3ED1-6E4E-CE6A-BB76802D1AE2}"/>
               </a:ext>
             </a:extLst>
           </p:cNvPr>
@@ -4585,7 +4583,7 @@
             <a:hlinkClick r:id="" action="ppaction://media"/>
             <a:extLst>
               <a:ext uri="{FF2B5EF4-FFF2-40B4-BE49-F238E27FC236}">
-                <a16:creationId xmlns:a16="http://schemas.microsoft.com/office/drawing/2014/main" id="{BE9834C5-F50C-9F89-5F10-0137995E9827}"/>
+                <a16:creationId xmlns:a16="http://schemas.microsoft.com/office/drawing/2014/main" id="{C95FEF62-2E0D-FED9-AFD2-13C10334FE4F}"/>
               </a:ext>
             </a:extLst>
           </p:cNvPr>
@@ -4620,7 +4618,7 @@
     </p:spTree>
     <p:extLst>
       <p:ext uri="{BB962C8B-B14F-4D97-AF65-F5344CB8AC3E}">
-        <p14:creationId xmlns:p14="http://schemas.microsoft.com/office/powerpoint/2010/main" val="2501739833"/>
+        <p14:creationId xmlns:p14="http://schemas.microsoft.com/office/powerpoint/2010/main" val="975050757"/>
       </p:ext>
     </p:extLst>
   </p:cSld>
@@ -4744,7 +4742,7 @@
           <p:cNvPr id="2" name="テキスト ボックス 1">
             <a:extLst>
               <a:ext uri="{FF2B5EF4-FFF2-40B4-BE49-F238E27FC236}">
-                <a16:creationId xmlns:a16="http://schemas.microsoft.com/office/drawing/2014/main" id="{AC782B8D-A7B2-C98A-23B2-CC53BA661408}"/>
+                <a16:creationId xmlns:a16="http://schemas.microsoft.com/office/drawing/2014/main" id="{81794178-678B-2693-9E14-A901AC3C6334}"/>
               </a:ext>
             </a:extLst>
           </p:cNvPr>
@@ -4790,7 +4788,7 @@
           <p:cNvPr id="3" name="テキスト ボックス 2">
             <a:extLst>
               <a:ext uri="{FF2B5EF4-FFF2-40B4-BE49-F238E27FC236}">
-                <a16:creationId xmlns:a16="http://schemas.microsoft.com/office/drawing/2014/main" id="{354B5F27-39F4-14E9-13CF-10DE4A9D385A}"/>
+                <a16:creationId xmlns:a16="http://schemas.microsoft.com/office/drawing/2014/main" id="{3294643D-DF9A-EC6F-7E0D-29E382C05553}"/>
               </a:ext>
             </a:extLst>
           </p:cNvPr>
@@ -4814,20 +4812,14 @@
           <a:lstStyle/>
           <a:p>
             <a:r>
-              <a:rPr kumimoji="1" lang="en-US" altLang="ja-JP" sz="3400" b="1">
+              <a:rPr kumimoji="1" lang="ja-JP" altLang="en-US" sz="3400" b="1">
                 <a:solidFill>
                   <a:srgbClr val="111111"/>
                 </a:solidFill>
                 <a:latin typeface="Arial" panose="020B0604020202020204" pitchFamily="34" charset="0"/>
               </a:rPr>
-              <a:t>REPOSITORY HIGHLIGHTS</a:t>
-            </a:r>
-            <a:endParaRPr kumimoji="1" lang="ja-JP" altLang="en-US" sz="3400" b="1">
-              <a:solidFill>
-                <a:srgbClr val="111111"/>
-              </a:solidFill>
-              <a:latin typeface="Arial" panose="020B0604020202020204" pitchFamily="34" charset="0"/>
-            </a:endParaRPr>
+              <a:t>リポジトリの読みどころ</a:t>
+            </a:r>
           </a:p>
         </p:txBody>
       </p:sp>
@@ -4836,7 +4828,7 @@
           <p:cNvPr id="4" name="テキスト ボックス 3">
             <a:extLst>
               <a:ext uri="{FF2B5EF4-FFF2-40B4-BE49-F238E27FC236}">
-                <a16:creationId xmlns:a16="http://schemas.microsoft.com/office/drawing/2014/main" id="{9FB7915C-F3B5-A0F9-03FD-46D326A0DEDD}"/>
+                <a16:creationId xmlns:a16="http://schemas.microsoft.com/office/drawing/2014/main" id="{38406D79-E54E-4940-706D-50B1BB1A32FB}"/>
               </a:ext>
             </a:extLst>
           </p:cNvPr>
@@ -4846,7 +4838,7 @@
         <p:spPr>
           <a:xfrm>
             <a:off x="533400" y="3429000"/>
-            <a:ext cx="10795000" cy="400110"/>
+            <a:ext cx="10795000" cy="707886"/>
           </a:xfrm>
           <a:prstGeom prst="rect">
             <a:avLst/>
@@ -4860,13 +4852,77 @@
           <a:lstStyle/>
           <a:p>
             <a:r>
+              <a:rPr kumimoji="1" lang="ja-JP" altLang="en-US" sz="2000">
+                <a:solidFill>
+                  <a:srgbClr val="333333"/>
+                </a:solidFill>
+                <a:latin typeface="Arial" panose="020B0604020202020204" pitchFamily="34" charset="0"/>
+              </a:rPr>
+              <a:t>公開コード、</a:t>
+            </a:r>
+            <a:r>
               <a:rPr kumimoji="1" lang="en-US" altLang="ja-JP" sz="2000">
                 <a:solidFill>
                   <a:srgbClr val="333333"/>
                 </a:solidFill>
                 <a:latin typeface="Arial" panose="020B0604020202020204" pitchFamily="34" charset="0"/>
               </a:rPr>
-              <a:t>Public source code, README and commit history reveal the design decisions.</a:t>
+              <a:t>README</a:t>
+            </a:r>
+            <a:r>
+              <a:rPr kumimoji="1" lang="ja-JP" altLang="en-US" sz="2000">
+                <a:solidFill>
+                  <a:srgbClr val="333333"/>
+                </a:solidFill>
+                <a:latin typeface="Arial" panose="020B0604020202020204" pitchFamily="34" charset="0"/>
+              </a:rPr>
+              <a:t>、コミット履歴から設計判断を確認できます。
+主なファイル：</a:t>
+            </a:r>
+            <a:r>
+              <a:rPr kumimoji="1" lang="en-US" altLang="ja-JP" sz="2000">
+                <a:solidFill>
+                  <a:srgbClr val="333333"/>
+                </a:solidFill>
+                <a:latin typeface="Arial" panose="020B0604020202020204" pitchFamily="34" charset="0"/>
+              </a:rPr>
+              <a:t>README.md</a:t>
+            </a:r>
+            <a:r>
+              <a:rPr kumimoji="1" lang="ja-JP" altLang="en-US" sz="2000">
+                <a:solidFill>
+                  <a:srgbClr val="333333"/>
+                </a:solidFill>
+                <a:latin typeface="Arial" panose="020B0604020202020204" pitchFamily="34" charset="0"/>
+              </a:rPr>
+              <a:t>、</a:t>
+            </a:r>
+            <a:r>
+              <a:rPr kumimoji="1" lang="en-US" altLang="ja-JP" sz="2000">
+                <a:solidFill>
+                  <a:srgbClr val="333333"/>
+                </a:solidFill>
+                <a:latin typeface="Arial" panose="020B0604020202020204" pitchFamily="34" charset="0"/>
+              </a:rPr>
+              <a:t>allbowl01.sln</a:t>
+            </a:r>
+            <a:r>
+              <a:rPr kumimoji="1" lang="ja-JP" altLang="en-US" sz="2000">
+                <a:solidFill>
+                  <a:srgbClr val="333333"/>
+                </a:solidFill>
+                <a:latin typeface="Arial" panose="020B0604020202020204" pitchFamily="34" charset="0"/>
+              </a:rPr>
+              <a:t>、</a:t>
+            </a:r>
+            <a:r>
+              <a:rPr kumimoji="1" lang="en-US" altLang="ja-JP" sz="2000">
+                <a:solidFill>
+                  <a:srgbClr val="333333"/>
+                </a:solidFill>
+                <a:latin typeface="Arial" panose="020B0604020202020204" pitchFamily="34" charset="0"/>
+              </a:rPr>
+              <a:t>allbowl01</a:t>
             </a:r>
             <a:endParaRPr kumimoji="1" lang="ja-JP" altLang="en-US" sz="2000">
               <a:solidFill>
@@ -4882,7 +4938,7 @@
           <p:cNvPr id="5" name="テキスト ボックス 4">
             <a:extLst>
               <a:ext uri="{FF2B5EF4-FFF2-40B4-BE49-F238E27FC236}">
-                <a16:creationId xmlns:a16="http://schemas.microsoft.com/office/drawing/2014/main" id="{AEF7CA2B-CBA4-2555-2D96-B155E96C121C}"/>
+                <a16:creationId xmlns:a16="http://schemas.microsoft.com/office/drawing/2014/main" id="{C17C5B53-BC6C-EBB3-45E5-14BF01D4F1DE}"/>
               </a:ext>
             </a:extLst>
           </p:cNvPr>
@@ -4929,7 +4985,7 @@
             <a:hlinkClick r:id="" action="ppaction://media"/>
             <a:extLst>
               <a:ext uri="{FF2B5EF4-FFF2-40B4-BE49-F238E27FC236}">
-                <a16:creationId xmlns:a16="http://schemas.microsoft.com/office/drawing/2014/main" id="{D41C4336-C20E-5FF3-BB0E-9491C61007F6}"/>
+                <a16:creationId xmlns:a16="http://schemas.microsoft.com/office/drawing/2014/main" id="{FD49B670-716B-5CEF-5F44-B57C95FD9936}"/>
               </a:ext>
             </a:extLst>
           </p:cNvPr>
@@ -4964,7 +5020,7 @@
     </p:spTree>
     <p:extLst>
       <p:ext uri="{BB962C8B-B14F-4D97-AF65-F5344CB8AC3E}">
-        <p14:creationId xmlns:p14="http://schemas.microsoft.com/office/powerpoint/2010/main" val="2253304595"/>
+        <p14:creationId xmlns:p14="http://schemas.microsoft.com/office/powerpoint/2010/main" val="3950600686"/>
       </p:ext>
     </p:extLst>
   </p:cSld>
@@ -5088,7 +5144,7 @@
           <p:cNvPr id="2" name="テキスト ボックス 1">
             <a:extLst>
               <a:ext uri="{FF2B5EF4-FFF2-40B4-BE49-F238E27FC236}">
-                <a16:creationId xmlns:a16="http://schemas.microsoft.com/office/drawing/2014/main" id="{073C0719-360D-EEEE-7B78-E4609672250F}"/>
+                <a16:creationId xmlns:a16="http://schemas.microsoft.com/office/drawing/2014/main" id="{D43DC959-52CD-E693-BDCF-36C5857518E5}"/>
               </a:ext>
             </a:extLst>
           </p:cNvPr>
@@ -5134,7 +5190,7 @@
           <p:cNvPr id="3" name="テキスト ボックス 2">
             <a:extLst>
               <a:ext uri="{FF2B5EF4-FFF2-40B4-BE49-F238E27FC236}">
-                <a16:creationId xmlns:a16="http://schemas.microsoft.com/office/drawing/2014/main" id="{D008A7F2-7232-BF9E-C9BC-A02D795F3D6F}"/>
+                <a16:creationId xmlns:a16="http://schemas.microsoft.com/office/drawing/2014/main" id="{D1A8980D-E881-714E-C6FB-D13DF0508BB7}"/>
               </a:ext>
             </a:extLst>
           </p:cNvPr>
@@ -5158,20 +5214,14 @@
           <a:lstStyle/>
           <a:p>
             <a:r>
-              <a:rPr kumimoji="1" lang="en-US" altLang="ja-JP" sz="3400" b="1">
+              <a:rPr kumimoji="1" lang="ja-JP" altLang="en-US" sz="3400" b="1">
                 <a:solidFill>
                   <a:srgbClr val="111111"/>
                 </a:solidFill>
                 <a:latin typeface="Arial" panose="020B0604020202020204" pitchFamily="34" charset="0"/>
               </a:rPr>
-              <a:t>ITERATIVE IMPROVEMENT</a:t>
-            </a:r>
-            <a:endParaRPr kumimoji="1" lang="ja-JP" altLang="en-US" sz="3400" b="1">
-              <a:solidFill>
-                <a:srgbClr val="111111"/>
-              </a:solidFill>
-              <a:latin typeface="Arial" panose="020B0604020202020204" pitchFamily="34" charset="0"/>
-            </a:endParaRPr>
+              <a:t>コミットから分かる改善</a:t>
+            </a:r>
           </a:p>
         </p:txBody>
       </p:sp>
@@ -5180,7 +5230,7 @@
           <p:cNvPr id="4" name="テキスト ボックス 3">
             <a:extLst>
               <a:ext uri="{FF2B5EF4-FFF2-40B4-BE49-F238E27FC236}">
-                <a16:creationId xmlns:a16="http://schemas.microsoft.com/office/drawing/2014/main" id="{E5745786-501A-B712-96D4-3F939D4EC076}"/>
+                <a16:creationId xmlns:a16="http://schemas.microsoft.com/office/drawing/2014/main" id="{BACBBBAC-574C-7438-A031-F24A18A54CD4}"/>
               </a:ext>
             </a:extLst>
           </p:cNvPr>
@@ -5210,7 +5260,7 @@
                 </a:solidFill>
                 <a:latin typeface="Arial" panose="020B0604020202020204" pitchFamily="34" charset="0"/>
               </a:rPr>
-              <a:t>Small commits continuously improve features, quality and release readiness.</a:t>
+              <a:t>Add SEO, LLMO, and UGC activation features for Astro and WordPress.</a:t>
             </a:r>
             <a:endParaRPr kumimoji="1" lang="ja-JP" altLang="en-US" sz="2000">
               <a:solidFill>
@@ -5226,7 +5276,7 @@
           <p:cNvPr id="5" name="テキスト ボックス 4">
             <a:extLst>
               <a:ext uri="{FF2B5EF4-FFF2-40B4-BE49-F238E27FC236}">
-                <a16:creationId xmlns:a16="http://schemas.microsoft.com/office/drawing/2014/main" id="{565AA143-B76B-9AD6-F222-48C33BD82E74}"/>
+                <a16:creationId xmlns:a16="http://schemas.microsoft.com/office/drawing/2014/main" id="{C4C67656-66A6-C393-FB3E-8600B22F7635}"/>
               </a:ext>
             </a:extLst>
           </p:cNvPr>
@@ -5273,7 +5323,7 @@
             <a:hlinkClick r:id="" action="ppaction://media"/>
             <a:extLst>
               <a:ext uri="{FF2B5EF4-FFF2-40B4-BE49-F238E27FC236}">
-                <a16:creationId xmlns:a16="http://schemas.microsoft.com/office/drawing/2014/main" id="{22657BDC-CD59-28C7-AC10-C1FD4156630D}"/>
+                <a16:creationId xmlns:a16="http://schemas.microsoft.com/office/drawing/2014/main" id="{0D160812-D7F4-593D-46A7-8E0B19502390}"/>
               </a:ext>
             </a:extLst>
           </p:cNvPr>
@@ -5308,7 +5358,7 @@
     </p:spTree>
     <p:extLst>
       <p:ext uri="{BB962C8B-B14F-4D97-AF65-F5344CB8AC3E}">
-        <p14:creationId xmlns:p14="http://schemas.microsoft.com/office/powerpoint/2010/main" val="3254959060"/>
+        <p14:creationId xmlns:p14="http://schemas.microsoft.com/office/powerpoint/2010/main" val="4267764126"/>
       </p:ext>
     </p:extLst>
   </p:cSld>
@@ -5432,7 +5482,7 @@
           <p:cNvPr id="2" name="テキスト ボックス 1">
             <a:extLst>
               <a:ext uri="{FF2B5EF4-FFF2-40B4-BE49-F238E27FC236}">
-                <a16:creationId xmlns:a16="http://schemas.microsoft.com/office/drawing/2014/main" id="{3857552F-5F1F-7978-FCB8-F016998E76D6}"/>
+                <a16:creationId xmlns:a16="http://schemas.microsoft.com/office/drawing/2014/main" id="{D1EBA0C9-D5EE-D262-73F7-E4F1E82445AB}"/>
               </a:ext>
             </a:extLst>
           </p:cNvPr>
@@ -5478,7 +5528,7 @@
           <p:cNvPr id="3" name="テキスト ボックス 2">
             <a:extLst>
               <a:ext uri="{FF2B5EF4-FFF2-40B4-BE49-F238E27FC236}">
-                <a16:creationId xmlns:a16="http://schemas.microsoft.com/office/drawing/2014/main" id="{FB239F70-06D4-4645-2907-EB6BAF2864D3}"/>
+                <a16:creationId xmlns:a16="http://schemas.microsoft.com/office/drawing/2014/main" id="{7D9A498C-9AC3-C99F-51C0-82FAACAE6369}"/>
               </a:ext>
             </a:extLst>
           </p:cNvPr>
@@ -5502,20 +5552,14 @@
           <a:lstStyle/>
           <a:p>
             <a:r>
-              <a:rPr kumimoji="1" lang="en-US" altLang="ja-JP" sz="3400" b="1">
+              <a:rPr kumimoji="1" lang="ja-JP" altLang="en-US" sz="3400" b="1">
                 <a:solidFill>
                   <a:srgbClr val="111111"/>
                 </a:solidFill>
                 <a:latin typeface="Arial" panose="020B0604020202020204" pitchFamily="34" charset="0"/>
               </a:rPr>
-              <a:t>READ THE FULL ARTICLE</a:t>
-            </a:r>
-            <a:endParaRPr kumimoji="1" lang="ja-JP" altLang="en-US" sz="3400" b="1">
-              <a:solidFill>
-                <a:srgbClr val="111111"/>
-              </a:solidFill>
-              <a:latin typeface="Arial" panose="020B0604020202020204" pitchFamily="34" charset="0"/>
-            </a:endParaRPr>
+              <a:t>詳しくは積み上げログへ</a:t>
+            </a:r>
           </a:p>
         </p:txBody>
       </p:sp>
@@ -5524,7 +5568,7 @@
           <p:cNvPr id="4" name="テキスト ボックス 3">
             <a:extLst>
               <a:ext uri="{FF2B5EF4-FFF2-40B4-BE49-F238E27FC236}">
-                <a16:creationId xmlns:a16="http://schemas.microsoft.com/office/drawing/2014/main" id="{449E621D-921E-DC59-775D-4269FCD3F461}"/>
+                <a16:creationId xmlns:a16="http://schemas.microsoft.com/office/drawing/2014/main" id="{604261D9-0CC2-2ECD-088A-3873A498BDD5}"/>
               </a:ext>
             </a:extLst>
           </p:cNvPr>
@@ -5548,14 +5592,32 @@
           <a:lstStyle/>
           <a:p>
             <a:r>
-              <a:rPr kumimoji="1" lang="sv-SE" altLang="ja-JP" sz="2000">
+              <a:rPr kumimoji="1" lang="zh-TW" altLang="en-US" sz="2000">
+                <a:solidFill>
+                  <a:srgbClr val="333333"/>
+                </a:solidFill>
+                <a:latin typeface="Arial" panose="020B0604020202020204" pitchFamily="34" charset="0"/>
+              </a:rPr>
+              <a:t>記事： </a:t>
+            </a:r>
+            <a:r>
+              <a:rPr kumimoji="1" lang="en-US" altLang="zh-TW" sz="2000">
                 <a:solidFill>
                   <a:srgbClr val="333333"/>
                 </a:solidFill>
                 <a:latin typeface="Arial" panose="020B0604020202020204" pitchFamily="34" charset="0"/>
               </a:rPr>
               <a:t>https://syunnjack.dev/articles/allbowl01
-TSUMIAGE LOG</a:t>
+</a:t>
+            </a:r>
+            <a:r>
+              <a:rPr kumimoji="1" lang="zh-TW" altLang="en-US" sz="2000">
+                <a:solidFill>
+                  <a:srgbClr val="333333"/>
+                </a:solidFill>
+                <a:latin typeface="Arial" panose="020B0604020202020204" pitchFamily="34" charset="0"/>
+              </a:rPr>
+              <a:t>学び、作り、振り返る開発記録。</a:t>
             </a:r>
             <a:endParaRPr kumimoji="1" lang="ja-JP" altLang="en-US" sz="2000">
               <a:solidFill>
@@ -5571,7 +5633,7 @@
           <p:cNvPr id="5" name="テキスト ボックス 4">
             <a:extLst>
               <a:ext uri="{FF2B5EF4-FFF2-40B4-BE49-F238E27FC236}">
-                <a16:creationId xmlns:a16="http://schemas.microsoft.com/office/drawing/2014/main" id="{E208454E-FD89-315B-65DF-D09D952D019D}"/>
+                <a16:creationId xmlns:a16="http://schemas.microsoft.com/office/drawing/2014/main" id="{FA2B3BE7-3F9D-22DA-7D2A-8D3AFC76E9EC}"/>
               </a:ext>
             </a:extLst>
           </p:cNvPr>
@@ -5618,7 +5680,7 @@
             <a:hlinkClick r:id="" action="ppaction://media"/>
             <a:extLst>
               <a:ext uri="{FF2B5EF4-FFF2-40B4-BE49-F238E27FC236}">
-                <a16:creationId xmlns:a16="http://schemas.microsoft.com/office/drawing/2014/main" id="{14B28EC6-42E9-A8C1-531E-FE3654C3CF62}"/>
+                <a16:creationId xmlns:a16="http://schemas.microsoft.com/office/drawing/2014/main" id="{05F99E42-13A8-D3C9-209F-E380C4CDAAB3}"/>
               </a:ext>
             </a:extLst>
           </p:cNvPr>
@@ -5653,7 +5715,7 @@
     </p:spTree>
     <p:extLst>
       <p:ext uri="{BB962C8B-B14F-4D97-AF65-F5344CB8AC3E}">
-        <p14:creationId xmlns:p14="http://schemas.microsoft.com/office/powerpoint/2010/main" val="736582400"/>
+        <p14:creationId xmlns:p14="http://schemas.microsoft.com/office/powerpoint/2010/main" val="2336228301"/>
       </p:ext>
     </p:extLst>
   </p:cSld>

--- a/public/videos/repositories/allbowl01/allbowl01-tech-preview.pptx
+++ b/public/videos/repositories/allbowl01/allbowl01-tech-preview.pptx
@@ -134,7 +134,7 @@
           <p:cNvPr id="2" name="タイトル 1">
             <a:extLst>
               <a:ext uri="{FF2B5EF4-FFF2-40B4-BE49-F238E27FC236}">
-                <a16:creationId xmlns:a16="http://schemas.microsoft.com/office/drawing/2014/main" id="{90B5AC26-4214-99C6-BBAF-B3231ADD16E0}"/>
+                <a16:creationId xmlns:a16="http://schemas.microsoft.com/office/drawing/2014/main" id="{ADA55AD2-0C24-263C-4387-BA9FBF6B6D15}"/>
               </a:ext>
             </a:extLst>
           </p:cNvPr>
@@ -171,7 +171,7 @@
           <p:cNvPr id="3" name="字幕 2">
             <a:extLst>
               <a:ext uri="{FF2B5EF4-FFF2-40B4-BE49-F238E27FC236}">
-                <a16:creationId xmlns:a16="http://schemas.microsoft.com/office/drawing/2014/main" id="{A0217943-D1BB-6F0B-F84E-663A05E7C733}"/>
+                <a16:creationId xmlns:a16="http://schemas.microsoft.com/office/drawing/2014/main" id="{CF57EE71-BBAC-9538-63B5-049E5E87C5E5}"/>
               </a:ext>
             </a:extLst>
           </p:cNvPr>
@@ -241,7 +241,7 @@
           <p:cNvPr id="4" name="日付プレースホルダー 3">
             <a:extLst>
               <a:ext uri="{FF2B5EF4-FFF2-40B4-BE49-F238E27FC236}">
-                <a16:creationId xmlns:a16="http://schemas.microsoft.com/office/drawing/2014/main" id="{779EF8F2-B947-3DF4-ED41-4C2ABAE7FB56}"/>
+                <a16:creationId xmlns:a16="http://schemas.microsoft.com/office/drawing/2014/main" id="{1C1F75BF-52C4-C57E-904E-9D657B74B0AB}"/>
               </a:ext>
             </a:extLst>
           </p:cNvPr>
@@ -257,7 +257,7 @@
           <a:bodyPr/>
           <a:lstStyle/>
           <a:p>
-            <a:fld id="{01DF3F40-F578-4070-8275-6AD5C9D05345}" type="datetimeFigureOut">
+            <a:fld id="{603D6C51-3858-4B5B-B9E8-CC98B942A82A}" type="datetimeFigureOut">
               <a:rPr kumimoji="1" lang="ja-JP" altLang="en-US" smtClean="0"/>
               <a:t>2026/7/30</a:t>
             </a:fld>
@@ -270,7 +270,7 @@
           <p:cNvPr id="5" name="フッター プレースホルダー 4">
             <a:extLst>
               <a:ext uri="{FF2B5EF4-FFF2-40B4-BE49-F238E27FC236}">
-                <a16:creationId xmlns:a16="http://schemas.microsoft.com/office/drawing/2014/main" id="{96F768FF-2E0A-DCE3-8DC9-CC39B11A44CC}"/>
+                <a16:creationId xmlns:a16="http://schemas.microsoft.com/office/drawing/2014/main" id="{E750B0D2-1A7A-A637-56E0-0D63B3D7D8C5}"/>
               </a:ext>
             </a:extLst>
           </p:cNvPr>
@@ -295,7 +295,7 @@
           <p:cNvPr id="6" name="スライド番号プレースホルダー 5">
             <a:extLst>
               <a:ext uri="{FF2B5EF4-FFF2-40B4-BE49-F238E27FC236}">
-                <a16:creationId xmlns:a16="http://schemas.microsoft.com/office/drawing/2014/main" id="{00F5972F-4585-3EE6-B0E0-F5A1FC4C9654}"/>
+                <a16:creationId xmlns:a16="http://schemas.microsoft.com/office/drawing/2014/main" id="{8B39BFD0-3D72-77E1-6A3C-BC890FA98CBC}"/>
               </a:ext>
             </a:extLst>
           </p:cNvPr>
@@ -311,7 +311,7 @@
           <a:bodyPr/>
           <a:lstStyle/>
           <a:p>
-            <a:fld id="{F8D92D34-3AA4-4C1C-B030-5CB7F31C0DCF}" type="slidenum">
+            <a:fld id="{0420BAE1-84E1-4DCD-B79B-8E4049F34B26}" type="slidenum">
               <a:rPr kumimoji="1" lang="ja-JP" altLang="en-US" smtClean="0"/>
               <a:t>‹#›</a:t>
             </a:fld>
@@ -322,7 +322,7 @@
     </p:spTree>
     <p:extLst>
       <p:ext uri="{BB962C8B-B14F-4D97-AF65-F5344CB8AC3E}">
-        <p14:creationId xmlns:p14="http://schemas.microsoft.com/office/powerpoint/2010/main" val="3730396715"/>
+        <p14:creationId xmlns:p14="http://schemas.microsoft.com/office/powerpoint/2010/main" val="283726601"/>
       </p:ext>
     </p:extLst>
   </p:cSld>
@@ -354,7 +354,7 @@
           <p:cNvPr id="2" name="タイトル 1">
             <a:extLst>
               <a:ext uri="{FF2B5EF4-FFF2-40B4-BE49-F238E27FC236}">
-                <a16:creationId xmlns:a16="http://schemas.microsoft.com/office/drawing/2014/main" id="{47C3F8A8-43F8-EC23-11F8-F39469F385FA}"/>
+                <a16:creationId xmlns:a16="http://schemas.microsoft.com/office/drawing/2014/main" id="{828D5D44-B1C6-6FAE-02B8-F510AF9C4260}"/>
               </a:ext>
             </a:extLst>
           </p:cNvPr>
@@ -382,7 +382,7 @@
           <p:cNvPr id="3" name="縦書きテキスト プレースホルダー 2">
             <a:extLst>
               <a:ext uri="{FF2B5EF4-FFF2-40B4-BE49-F238E27FC236}">
-                <a16:creationId xmlns:a16="http://schemas.microsoft.com/office/drawing/2014/main" id="{CEB7D51A-9FB8-B516-29FC-571FBDA4662C}"/>
+                <a16:creationId xmlns:a16="http://schemas.microsoft.com/office/drawing/2014/main" id="{21BD721E-938C-09CC-2A48-42338681BD4B}"/>
               </a:ext>
             </a:extLst>
           </p:cNvPr>
@@ -471,7 +471,7 @@
           <p:cNvPr id="4" name="日付プレースホルダー 3">
             <a:extLst>
               <a:ext uri="{FF2B5EF4-FFF2-40B4-BE49-F238E27FC236}">
-                <a16:creationId xmlns:a16="http://schemas.microsoft.com/office/drawing/2014/main" id="{38CB4DC2-ADEE-A181-D715-743DB3167185}"/>
+                <a16:creationId xmlns:a16="http://schemas.microsoft.com/office/drawing/2014/main" id="{797A9FA7-6895-EECC-64CA-02B03F5E0177}"/>
               </a:ext>
             </a:extLst>
           </p:cNvPr>
@@ -487,7 +487,7 @@
           <a:bodyPr/>
           <a:lstStyle/>
           <a:p>
-            <a:fld id="{01DF3F40-F578-4070-8275-6AD5C9D05345}" type="datetimeFigureOut">
+            <a:fld id="{603D6C51-3858-4B5B-B9E8-CC98B942A82A}" type="datetimeFigureOut">
               <a:rPr kumimoji="1" lang="ja-JP" altLang="en-US" smtClean="0"/>
               <a:t>2026/7/30</a:t>
             </a:fld>
@@ -500,7 +500,7 @@
           <p:cNvPr id="5" name="フッター プレースホルダー 4">
             <a:extLst>
               <a:ext uri="{FF2B5EF4-FFF2-40B4-BE49-F238E27FC236}">
-                <a16:creationId xmlns:a16="http://schemas.microsoft.com/office/drawing/2014/main" id="{CEE79E9D-512A-9032-E250-54801CC35C38}"/>
+                <a16:creationId xmlns:a16="http://schemas.microsoft.com/office/drawing/2014/main" id="{7CBD3627-3774-66C5-8AC7-28E15056EFD3}"/>
               </a:ext>
             </a:extLst>
           </p:cNvPr>
@@ -525,7 +525,7 @@
           <p:cNvPr id="6" name="スライド番号プレースホルダー 5">
             <a:extLst>
               <a:ext uri="{FF2B5EF4-FFF2-40B4-BE49-F238E27FC236}">
-                <a16:creationId xmlns:a16="http://schemas.microsoft.com/office/drawing/2014/main" id="{6AF0A8CD-E583-1FA1-0810-AA90EAA1CA81}"/>
+                <a16:creationId xmlns:a16="http://schemas.microsoft.com/office/drawing/2014/main" id="{5207B1B0-F032-F230-EC1B-A8F12C222754}"/>
               </a:ext>
             </a:extLst>
           </p:cNvPr>
@@ -541,7 +541,7 @@
           <a:bodyPr/>
           <a:lstStyle/>
           <a:p>
-            <a:fld id="{F8D92D34-3AA4-4C1C-B030-5CB7F31C0DCF}" type="slidenum">
+            <a:fld id="{0420BAE1-84E1-4DCD-B79B-8E4049F34B26}" type="slidenum">
               <a:rPr kumimoji="1" lang="ja-JP" altLang="en-US" smtClean="0"/>
               <a:t>‹#›</a:t>
             </a:fld>
@@ -552,7 +552,7 @@
     </p:spTree>
     <p:extLst>
       <p:ext uri="{BB962C8B-B14F-4D97-AF65-F5344CB8AC3E}">
-        <p14:creationId xmlns:p14="http://schemas.microsoft.com/office/powerpoint/2010/main" val="34695970"/>
+        <p14:creationId xmlns:p14="http://schemas.microsoft.com/office/powerpoint/2010/main" val="1467807703"/>
       </p:ext>
     </p:extLst>
   </p:cSld>
@@ -584,7 +584,7 @@
           <p:cNvPr id="2" name="縦書きタイトル 1">
             <a:extLst>
               <a:ext uri="{FF2B5EF4-FFF2-40B4-BE49-F238E27FC236}">
-                <a16:creationId xmlns:a16="http://schemas.microsoft.com/office/drawing/2014/main" id="{7100C6CC-B385-DDDE-A83B-3FD8E4A51DB0}"/>
+                <a16:creationId xmlns:a16="http://schemas.microsoft.com/office/drawing/2014/main" id="{BCFA2FBF-5544-DD32-DEC6-4E699531E699}"/>
               </a:ext>
             </a:extLst>
           </p:cNvPr>
@@ -617,7 +617,7 @@
           <p:cNvPr id="3" name="縦書きテキスト プレースホルダー 2">
             <a:extLst>
               <a:ext uri="{FF2B5EF4-FFF2-40B4-BE49-F238E27FC236}">
-                <a16:creationId xmlns:a16="http://schemas.microsoft.com/office/drawing/2014/main" id="{2C7D6F0E-4BE5-BBE1-BFDD-A668A20036B3}"/>
+                <a16:creationId xmlns:a16="http://schemas.microsoft.com/office/drawing/2014/main" id="{31BC241E-D4AD-A568-5715-F98408032DCE}"/>
               </a:ext>
             </a:extLst>
           </p:cNvPr>
@@ -711,7 +711,7 @@
           <p:cNvPr id="4" name="日付プレースホルダー 3">
             <a:extLst>
               <a:ext uri="{FF2B5EF4-FFF2-40B4-BE49-F238E27FC236}">
-                <a16:creationId xmlns:a16="http://schemas.microsoft.com/office/drawing/2014/main" id="{092778A5-4F11-B00D-B135-E7DD44FE4385}"/>
+                <a16:creationId xmlns:a16="http://schemas.microsoft.com/office/drawing/2014/main" id="{DC777E1E-5FFA-AEA8-4A80-D9B567F1CC6F}"/>
               </a:ext>
             </a:extLst>
           </p:cNvPr>
@@ -727,7 +727,7 @@
           <a:bodyPr/>
           <a:lstStyle/>
           <a:p>
-            <a:fld id="{01DF3F40-F578-4070-8275-6AD5C9D05345}" type="datetimeFigureOut">
+            <a:fld id="{603D6C51-3858-4B5B-B9E8-CC98B942A82A}" type="datetimeFigureOut">
               <a:rPr kumimoji="1" lang="ja-JP" altLang="en-US" smtClean="0"/>
               <a:t>2026/7/30</a:t>
             </a:fld>
@@ -740,7 +740,7 @@
           <p:cNvPr id="5" name="フッター プレースホルダー 4">
             <a:extLst>
               <a:ext uri="{FF2B5EF4-FFF2-40B4-BE49-F238E27FC236}">
-                <a16:creationId xmlns:a16="http://schemas.microsoft.com/office/drawing/2014/main" id="{0C646513-127D-F565-A9D8-2BC46EC6C47B}"/>
+                <a16:creationId xmlns:a16="http://schemas.microsoft.com/office/drawing/2014/main" id="{E02AB72D-662C-420E-672A-BEAE4EE10907}"/>
               </a:ext>
             </a:extLst>
           </p:cNvPr>
@@ -765,7 +765,7 @@
           <p:cNvPr id="6" name="スライド番号プレースホルダー 5">
             <a:extLst>
               <a:ext uri="{FF2B5EF4-FFF2-40B4-BE49-F238E27FC236}">
-                <a16:creationId xmlns:a16="http://schemas.microsoft.com/office/drawing/2014/main" id="{FFB184D4-7499-83C2-1A99-4C7DF3B9978E}"/>
+                <a16:creationId xmlns:a16="http://schemas.microsoft.com/office/drawing/2014/main" id="{F882742F-A700-CFBE-5200-F65C894003E8}"/>
               </a:ext>
             </a:extLst>
           </p:cNvPr>
@@ -781,7 +781,7 @@
           <a:bodyPr/>
           <a:lstStyle/>
           <a:p>
-            <a:fld id="{F8D92D34-3AA4-4C1C-B030-5CB7F31C0DCF}" type="slidenum">
+            <a:fld id="{0420BAE1-84E1-4DCD-B79B-8E4049F34B26}" type="slidenum">
               <a:rPr kumimoji="1" lang="ja-JP" altLang="en-US" smtClean="0"/>
               <a:t>‹#›</a:t>
             </a:fld>
@@ -792,7 +792,7 @@
     </p:spTree>
     <p:extLst>
       <p:ext uri="{BB962C8B-B14F-4D97-AF65-F5344CB8AC3E}">
-        <p14:creationId xmlns:p14="http://schemas.microsoft.com/office/powerpoint/2010/main" val="1372581425"/>
+        <p14:creationId xmlns:p14="http://schemas.microsoft.com/office/powerpoint/2010/main" val="426173948"/>
       </p:ext>
     </p:extLst>
   </p:cSld>
@@ -824,7 +824,7 @@
           <p:cNvPr id="2" name="タイトル 1">
             <a:extLst>
               <a:ext uri="{FF2B5EF4-FFF2-40B4-BE49-F238E27FC236}">
-                <a16:creationId xmlns:a16="http://schemas.microsoft.com/office/drawing/2014/main" id="{519C0844-49EC-76AE-B5B7-2867ED2CDF39}"/>
+                <a16:creationId xmlns:a16="http://schemas.microsoft.com/office/drawing/2014/main" id="{50B17C0E-60FE-B850-F92A-0E73908DF8DF}"/>
               </a:ext>
             </a:extLst>
           </p:cNvPr>
@@ -852,7 +852,7 @@
           <p:cNvPr id="3" name="コンテンツ プレースホルダー 2">
             <a:extLst>
               <a:ext uri="{FF2B5EF4-FFF2-40B4-BE49-F238E27FC236}">
-                <a16:creationId xmlns:a16="http://schemas.microsoft.com/office/drawing/2014/main" id="{24AF36F9-A4CD-6BCA-B23C-709DD3383058}"/>
+                <a16:creationId xmlns:a16="http://schemas.microsoft.com/office/drawing/2014/main" id="{D7685007-CF5C-F990-8A45-F4263B0CB3E3}"/>
               </a:ext>
             </a:extLst>
           </p:cNvPr>
@@ -941,7 +941,7 @@
           <p:cNvPr id="4" name="日付プレースホルダー 3">
             <a:extLst>
               <a:ext uri="{FF2B5EF4-FFF2-40B4-BE49-F238E27FC236}">
-                <a16:creationId xmlns:a16="http://schemas.microsoft.com/office/drawing/2014/main" id="{48DCB131-BFBC-F6A6-FA94-291B1438F8F0}"/>
+                <a16:creationId xmlns:a16="http://schemas.microsoft.com/office/drawing/2014/main" id="{2B4049E6-9FCD-FB29-9242-C741E06B0219}"/>
               </a:ext>
             </a:extLst>
           </p:cNvPr>
@@ -957,7 +957,7 @@
           <a:bodyPr/>
           <a:lstStyle/>
           <a:p>
-            <a:fld id="{01DF3F40-F578-4070-8275-6AD5C9D05345}" type="datetimeFigureOut">
+            <a:fld id="{603D6C51-3858-4B5B-B9E8-CC98B942A82A}" type="datetimeFigureOut">
               <a:rPr kumimoji="1" lang="ja-JP" altLang="en-US" smtClean="0"/>
               <a:t>2026/7/30</a:t>
             </a:fld>
@@ -970,7 +970,7 @@
           <p:cNvPr id="5" name="フッター プレースホルダー 4">
             <a:extLst>
               <a:ext uri="{FF2B5EF4-FFF2-40B4-BE49-F238E27FC236}">
-                <a16:creationId xmlns:a16="http://schemas.microsoft.com/office/drawing/2014/main" id="{B79C587D-6292-4E8A-AF79-2FFDF995BBB1}"/>
+                <a16:creationId xmlns:a16="http://schemas.microsoft.com/office/drawing/2014/main" id="{45EB63BA-45CC-DABA-51C3-719BB8D8AF18}"/>
               </a:ext>
             </a:extLst>
           </p:cNvPr>
@@ -995,7 +995,7 @@
           <p:cNvPr id="6" name="スライド番号プレースホルダー 5">
             <a:extLst>
               <a:ext uri="{FF2B5EF4-FFF2-40B4-BE49-F238E27FC236}">
-                <a16:creationId xmlns:a16="http://schemas.microsoft.com/office/drawing/2014/main" id="{96F52B43-3F5E-CA75-CC38-62BC3463AC8D}"/>
+                <a16:creationId xmlns:a16="http://schemas.microsoft.com/office/drawing/2014/main" id="{17DF3747-C003-3085-3A86-5DE5B650D914}"/>
               </a:ext>
             </a:extLst>
           </p:cNvPr>
@@ -1011,7 +1011,7 @@
           <a:bodyPr/>
           <a:lstStyle/>
           <a:p>
-            <a:fld id="{F8D92D34-3AA4-4C1C-B030-5CB7F31C0DCF}" type="slidenum">
+            <a:fld id="{0420BAE1-84E1-4DCD-B79B-8E4049F34B26}" type="slidenum">
               <a:rPr kumimoji="1" lang="ja-JP" altLang="en-US" smtClean="0"/>
               <a:t>‹#›</a:t>
             </a:fld>
@@ -1022,7 +1022,7 @@
     </p:spTree>
     <p:extLst>
       <p:ext uri="{BB962C8B-B14F-4D97-AF65-F5344CB8AC3E}">
-        <p14:creationId xmlns:p14="http://schemas.microsoft.com/office/powerpoint/2010/main" val="3975501056"/>
+        <p14:creationId xmlns:p14="http://schemas.microsoft.com/office/powerpoint/2010/main" val="1306472775"/>
       </p:ext>
     </p:extLst>
   </p:cSld>
@@ -1054,7 +1054,7 @@
           <p:cNvPr id="2" name="タイトル 1">
             <a:extLst>
               <a:ext uri="{FF2B5EF4-FFF2-40B4-BE49-F238E27FC236}">
-                <a16:creationId xmlns:a16="http://schemas.microsoft.com/office/drawing/2014/main" id="{599B585F-DB4E-8469-9B6D-2286701D8B2E}"/>
+                <a16:creationId xmlns:a16="http://schemas.microsoft.com/office/drawing/2014/main" id="{4E52FD89-8E15-97A6-BBA2-7CBE5D4D18CA}"/>
               </a:ext>
             </a:extLst>
           </p:cNvPr>
@@ -1091,7 +1091,7 @@
           <p:cNvPr id="3" name="テキスト プレースホルダー 2">
             <a:extLst>
               <a:ext uri="{FF2B5EF4-FFF2-40B4-BE49-F238E27FC236}">
-                <a16:creationId xmlns:a16="http://schemas.microsoft.com/office/drawing/2014/main" id="{D22EB1FD-68EB-7789-3FCE-351ED98AF799}"/>
+                <a16:creationId xmlns:a16="http://schemas.microsoft.com/office/drawing/2014/main" id="{3C090F13-3F59-3313-A364-0F9023351B1E}"/>
               </a:ext>
             </a:extLst>
           </p:cNvPr>
@@ -1216,7 +1216,7 @@
           <p:cNvPr id="4" name="日付プレースホルダー 3">
             <a:extLst>
               <a:ext uri="{FF2B5EF4-FFF2-40B4-BE49-F238E27FC236}">
-                <a16:creationId xmlns:a16="http://schemas.microsoft.com/office/drawing/2014/main" id="{DBD87963-FA62-D32E-52D2-E31021F7FD88}"/>
+                <a16:creationId xmlns:a16="http://schemas.microsoft.com/office/drawing/2014/main" id="{E659D0F1-ECDB-7AA7-2EF7-AF5C7DC025C5}"/>
               </a:ext>
             </a:extLst>
           </p:cNvPr>
@@ -1232,7 +1232,7 @@
           <a:bodyPr/>
           <a:lstStyle/>
           <a:p>
-            <a:fld id="{01DF3F40-F578-4070-8275-6AD5C9D05345}" type="datetimeFigureOut">
+            <a:fld id="{603D6C51-3858-4B5B-B9E8-CC98B942A82A}" type="datetimeFigureOut">
               <a:rPr kumimoji="1" lang="ja-JP" altLang="en-US" smtClean="0"/>
               <a:t>2026/7/30</a:t>
             </a:fld>
@@ -1245,7 +1245,7 @@
           <p:cNvPr id="5" name="フッター プレースホルダー 4">
             <a:extLst>
               <a:ext uri="{FF2B5EF4-FFF2-40B4-BE49-F238E27FC236}">
-                <a16:creationId xmlns:a16="http://schemas.microsoft.com/office/drawing/2014/main" id="{D9F7B237-ED21-5159-DAD1-E51C7FD79AA4}"/>
+                <a16:creationId xmlns:a16="http://schemas.microsoft.com/office/drawing/2014/main" id="{AB311735-B757-BFA2-3E61-39A841DB4E45}"/>
               </a:ext>
             </a:extLst>
           </p:cNvPr>
@@ -1270,7 +1270,7 @@
           <p:cNvPr id="6" name="スライド番号プレースホルダー 5">
             <a:extLst>
               <a:ext uri="{FF2B5EF4-FFF2-40B4-BE49-F238E27FC236}">
-                <a16:creationId xmlns:a16="http://schemas.microsoft.com/office/drawing/2014/main" id="{4A02D6E1-1E32-96CB-F767-2F5021E6085E}"/>
+                <a16:creationId xmlns:a16="http://schemas.microsoft.com/office/drawing/2014/main" id="{319BAC89-E6B6-4215-916D-B8D7C264C775}"/>
               </a:ext>
             </a:extLst>
           </p:cNvPr>
@@ -1286,7 +1286,7 @@
           <a:bodyPr/>
           <a:lstStyle/>
           <a:p>
-            <a:fld id="{F8D92D34-3AA4-4C1C-B030-5CB7F31C0DCF}" type="slidenum">
+            <a:fld id="{0420BAE1-84E1-4DCD-B79B-8E4049F34B26}" type="slidenum">
               <a:rPr kumimoji="1" lang="ja-JP" altLang="en-US" smtClean="0"/>
               <a:t>‹#›</a:t>
             </a:fld>
@@ -1297,7 +1297,7 @@
     </p:spTree>
     <p:extLst>
       <p:ext uri="{BB962C8B-B14F-4D97-AF65-F5344CB8AC3E}">
-        <p14:creationId xmlns:p14="http://schemas.microsoft.com/office/powerpoint/2010/main" val="2949549573"/>
+        <p14:creationId xmlns:p14="http://schemas.microsoft.com/office/powerpoint/2010/main" val="1508018798"/>
       </p:ext>
     </p:extLst>
   </p:cSld>
@@ -1329,7 +1329,7 @@
           <p:cNvPr id="2" name="タイトル 1">
             <a:extLst>
               <a:ext uri="{FF2B5EF4-FFF2-40B4-BE49-F238E27FC236}">
-                <a16:creationId xmlns:a16="http://schemas.microsoft.com/office/drawing/2014/main" id="{252A3590-1094-4D8C-031F-43168FB044CA}"/>
+                <a16:creationId xmlns:a16="http://schemas.microsoft.com/office/drawing/2014/main" id="{18F193F9-5372-DB32-ED89-98E6665F7ACD}"/>
               </a:ext>
             </a:extLst>
           </p:cNvPr>
@@ -1357,7 +1357,7 @@
           <p:cNvPr id="3" name="コンテンツ プレースホルダー 2">
             <a:extLst>
               <a:ext uri="{FF2B5EF4-FFF2-40B4-BE49-F238E27FC236}">
-                <a16:creationId xmlns:a16="http://schemas.microsoft.com/office/drawing/2014/main" id="{2942D5BC-488C-D1F3-5D13-B97D74B9D6EC}"/>
+                <a16:creationId xmlns:a16="http://schemas.microsoft.com/office/drawing/2014/main" id="{0CF4EDD8-8F01-0CE9-8E17-84D18646E4BC}"/>
               </a:ext>
             </a:extLst>
           </p:cNvPr>
@@ -1451,7 +1451,7 @@
           <p:cNvPr id="4" name="コンテンツ プレースホルダー 3">
             <a:extLst>
               <a:ext uri="{FF2B5EF4-FFF2-40B4-BE49-F238E27FC236}">
-                <a16:creationId xmlns:a16="http://schemas.microsoft.com/office/drawing/2014/main" id="{D9A448E5-85DC-9E18-CDD8-F16FA420F73F}"/>
+                <a16:creationId xmlns:a16="http://schemas.microsoft.com/office/drawing/2014/main" id="{4E723E3C-6CE4-3501-E164-6C8DCE898CF5}"/>
               </a:ext>
             </a:extLst>
           </p:cNvPr>
@@ -1545,7 +1545,7 @@
           <p:cNvPr id="5" name="日付プレースホルダー 4">
             <a:extLst>
               <a:ext uri="{FF2B5EF4-FFF2-40B4-BE49-F238E27FC236}">
-                <a16:creationId xmlns:a16="http://schemas.microsoft.com/office/drawing/2014/main" id="{9D01C416-24AF-A742-6B44-BC494BA265B8}"/>
+                <a16:creationId xmlns:a16="http://schemas.microsoft.com/office/drawing/2014/main" id="{B9FCFE87-24D3-76F4-9B6E-0913D66AAC34}"/>
               </a:ext>
             </a:extLst>
           </p:cNvPr>
@@ -1561,7 +1561,7 @@
           <a:bodyPr/>
           <a:lstStyle/>
           <a:p>
-            <a:fld id="{01DF3F40-F578-4070-8275-6AD5C9D05345}" type="datetimeFigureOut">
+            <a:fld id="{603D6C51-3858-4B5B-B9E8-CC98B942A82A}" type="datetimeFigureOut">
               <a:rPr kumimoji="1" lang="ja-JP" altLang="en-US" smtClean="0"/>
               <a:t>2026/7/30</a:t>
             </a:fld>
@@ -1574,7 +1574,7 @@
           <p:cNvPr id="6" name="フッター プレースホルダー 5">
             <a:extLst>
               <a:ext uri="{FF2B5EF4-FFF2-40B4-BE49-F238E27FC236}">
-                <a16:creationId xmlns:a16="http://schemas.microsoft.com/office/drawing/2014/main" id="{E0C452B8-0178-FB08-81D5-0A8297E3F8A2}"/>
+                <a16:creationId xmlns:a16="http://schemas.microsoft.com/office/drawing/2014/main" id="{EBDE1A46-5234-460C-FE23-748631F0CC96}"/>
               </a:ext>
             </a:extLst>
           </p:cNvPr>
@@ -1599,7 +1599,7 @@
           <p:cNvPr id="7" name="スライド番号プレースホルダー 6">
             <a:extLst>
               <a:ext uri="{FF2B5EF4-FFF2-40B4-BE49-F238E27FC236}">
-                <a16:creationId xmlns:a16="http://schemas.microsoft.com/office/drawing/2014/main" id="{6A07FC42-D80F-1FF1-3252-04F5457C06DC}"/>
+                <a16:creationId xmlns:a16="http://schemas.microsoft.com/office/drawing/2014/main" id="{04B7BA5E-25DA-0B2D-EA9B-2210641EFA1A}"/>
               </a:ext>
             </a:extLst>
           </p:cNvPr>
@@ -1615,7 +1615,7 @@
           <a:bodyPr/>
           <a:lstStyle/>
           <a:p>
-            <a:fld id="{F8D92D34-3AA4-4C1C-B030-5CB7F31C0DCF}" type="slidenum">
+            <a:fld id="{0420BAE1-84E1-4DCD-B79B-8E4049F34B26}" type="slidenum">
               <a:rPr kumimoji="1" lang="ja-JP" altLang="en-US" smtClean="0"/>
               <a:t>‹#›</a:t>
             </a:fld>
@@ -1626,7 +1626,7 @@
     </p:spTree>
     <p:extLst>
       <p:ext uri="{BB962C8B-B14F-4D97-AF65-F5344CB8AC3E}">
-        <p14:creationId xmlns:p14="http://schemas.microsoft.com/office/powerpoint/2010/main" val="2679245194"/>
+        <p14:creationId xmlns:p14="http://schemas.microsoft.com/office/powerpoint/2010/main" val="877379312"/>
       </p:ext>
     </p:extLst>
   </p:cSld>
@@ -1658,7 +1658,7 @@
           <p:cNvPr id="2" name="タイトル 1">
             <a:extLst>
               <a:ext uri="{FF2B5EF4-FFF2-40B4-BE49-F238E27FC236}">
-                <a16:creationId xmlns:a16="http://schemas.microsoft.com/office/drawing/2014/main" id="{6E6ED7C4-A63E-75D7-81C7-A98CEC95D266}"/>
+                <a16:creationId xmlns:a16="http://schemas.microsoft.com/office/drawing/2014/main" id="{9A576FC9-23F7-65FD-0AF4-891EAEF16C1C}"/>
               </a:ext>
             </a:extLst>
           </p:cNvPr>
@@ -1691,7 +1691,7 @@
           <p:cNvPr id="3" name="テキスト プレースホルダー 2">
             <a:extLst>
               <a:ext uri="{FF2B5EF4-FFF2-40B4-BE49-F238E27FC236}">
-                <a16:creationId xmlns:a16="http://schemas.microsoft.com/office/drawing/2014/main" id="{A74D8017-2E2B-5D72-6153-E7BAF6CFC717}"/>
+                <a16:creationId xmlns:a16="http://schemas.microsoft.com/office/drawing/2014/main" id="{498C2C19-57A8-E215-CBAB-070C482647A0}"/>
               </a:ext>
             </a:extLst>
           </p:cNvPr>
@@ -1762,7 +1762,7 @@
           <p:cNvPr id="4" name="コンテンツ プレースホルダー 3">
             <a:extLst>
               <a:ext uri="{FF2B5EF4-FFF2-40B4-BE49-F238E27FC236}">
-                <a16:creationId xmlns:a16="http://schemas.microsoft.com/office/drawing/2014/main" id="{D5CFACFE-1C50-A5EE-731A-5608A87503AE}"/>
+                <a16:creationId xmlns:a16="http://schemas.microsoft.com/office/drawing/2014/main" id="{EF381B49-8D27-779D-01AE-86BA86DE8F2A}"/>
               </a:ext>
             </a:extLst>
           </p:cNvPr>
@@ -1856,7 +1856,7 @@
           <p:cNvPr id="5" name="テキスト プレースホルダー 4">
             <a:extLst>
               <a:ext uri="{FF2B5EF4-FFF2-40B4-BE49-F238E27FC236}">
-                <a16:creationId xmlns:a16="http://schemas.microsoft.com/office/drawing/2014/main" id="{A3510BEA-0194-B81A-E5D7-87C07807C3FB}"/>
+                <a16:creationId xmlns:a16="http://schemas.microsoft.com/office/drawing/2014/main" id="{FA742D6D-6479-E454-610E-2C51160979B5}"/>
               </a:ext>
             </a:extLst>
           </p:cNvPr>
@@ -1927,7 +1927,7 @@
           <p:cNvPr id="6" name="コンテンツ プレースホルダー 5">
             <a:extLst>
               <a:ext uri="{FF2B5EF4-FFF2-40B4-BE49-F238E27FC236}">
-                <a16:creationId xmlns:a16="http://schemas.microsoft.com/office/drawing/2014/main" id="{8FC65B43-DBE8-105B-B8AB-CB84D66BB252}"/>
+                <a16:creationId xmlns:a16="http://schemas.microsoft.com/office/drawing/2014/main" id="{207C6BCB-5F24-2F90-7B90-FCAECF09C885}"/>
               </a:ext>
             </a:extLst>
           </p:cNvPr>
@@ -2021,7 +2021,7 @@
           <p:cNvPr id="7" name="日付プレースホルダー 6">
             <a:extLst>
               <a:ext uri="{FF2B5EF4-FFF2-40B4-BE49-F238E27FC236}">
-                <a16:creationId xmlns:a16="http://schemas.microsoft.com/office/drawing/2014/main" id="{CF66AB6E-C663-0FE3-F22E-0D7D05A75DA0}"/>
+                <a16:creationId xmlns:a16="http://schemas.microsoft.com/office/drawing/2014/main" id="{9593DDF3-AEFD-071B-31F7-775402F045AF}"/>
               </a:ext>
             </a:extLst>
           </p:cNvPr>
@@ -2037,7 +2037,7 @@
           <a:bodyPr/>
           <a:lstStyle/>
           <a:p>
-            <a:fld id="{01DF3F40-F578-4070-8275-6AD5C9D05345}" type="datetimeFigureOut">
+            <a:fld id="{603D6C51-3858-4B5B-B9E8-CC98B942A82A}" type="datetimeFigureOut">
               <a:rPr kumimoji="1" lang="ja-JP" altLang="en-US" smtClean="0"/>
               <a:t>2026/7/30</a:t>
             </a:fld>
@@ -2050,7 +2050,7 @@
           <p:cNvPr id="8" name="フッター プレースホルダー 7">
             <a:extLst>
               <a:ext uri="{FF2B5EF4-FFF2-40B4-BE49-F238E27FC236}">
-                <a16:creationId xmlns:a16="http://schemas.microsoft.com/office/drawing/2014/main" id="{4E5FDA64-6B9B-7453-D0D4-FC1ED70328C8}"/>
+                <a16:creationId xmlns:a16="http://schemas.microsoft.com/office/drawing/2014/main" id="{BE14FDE5-B87D-7100-17A2-AA1E85FCF4D7}"/>
               </a:ext>
             </a:extLst>
           </p:cNvPr>
@@ -2075,7 +2075,7 @@
           <p:cNvPr id="9" name="スライド番号プレースホルダー 8">
             <a:extLst>
               <a:ext uri="{FF2B5EF4-FFF2-40B4-BE49-F238E27FC236}">
-                <a16:creationId xmlns:a16="http://schemas.microsoft.com/office/drawing/2014/main" id="{5390FEB5-4551-2110-806C-C48114CB9CA4}"/>
+                <a16:creationId xmlns:a16="http://schemas.microsoft.com/office/drawing/2014/main" id="{0EFFDAA2-A38E-EC93-872E-BD176853CB18}"/>
               </a:ext>
             </a:extLst>
           </p:cNvPr>
@@ -2091,7 +2091,7 @@
           <a:bodyPr/>
           <a:lstStyle/>
           <a:p>
-            <a:fld id="{F8D92D34-3AA4-4C1C-B030-5CB7F31C0DCF}" type="slidenum">
+            <a:fld id="{0420BAE1-84E1-4DCD-B79B-8E4049F34B26}" type="slidenum">
               <a:rPr kumimoji="1" lang="ja-JP" altLang="en-US" smtClean="0"/>
               <a:t>‹#›</a:t>
             </a:fld>
@@ -2102,7 +2102,7 @@
     </p:spTree>
     <p:extLst>
       <p:ext uri="{BB962C8B-B14F-4D97-AF65-F5344CB8AC3E}">
-        <p14:creationId xmlns:p14="http://schemas.microsoft.com/office/powerpoint/2010/main" val="3909760803"/>
+        <p14:creationId xmlns:p14="http://schemas.microsoft.com/office/powerpoint/2010/main" val="3547983212"/>
       </p:ext>
     </p:extLst>
   </p:cSld>
@@ -2134,7 +2134,7 @@
           <p:cNvPr id="2" name="タイトル 1">
             <a:extLst>
               <a:ext uri="{FF2B5EF4-FFF2-40B4-BE49-F238E27FC236}">
-                <a16:creationId xmlns:a16="http://schemas.microsoft.com/office/drawing/2014/main" id="{34B53663-9B96-BF8B-B061-3C913D09AED9}"/>
+                <a16:creationId xmlns:a16="http://schemas.microsoft.com/office/drawing/2014/main" id="{6348A22F-C75C-6BC4-E5A2-4868ECEEADCB}"/>
               </a:ext>
             </a:extLst>
           </p:cNvPr>
@@ -2162,7 +2162,7 @@
           <p:cNvPr id="3" name="日付プレースホルダー 2">
             <a:extLst>
               <a:ext uri="{FF2B5EF4-FFF2-40B4-BE49-F238E27FC236}">
-                <a16:creationId xmlns:a16="http://schemas.microsoft.com/office/drawing/2014/main" id="{E164D912-AB61-97AF-D2C9-C347FFA1EF8E}"/>
+                <a16:creationId xmlns:a16="http://schemas.microsoft.com/office/drawing/2014/main" id="{326B0092-171A-0A31-5974-A270F8137F70}"/>
               </a:ext>
             </a:extLst>
           </p:cNvPr>
@@ -2178,7 +2178,7 @@
           <a:bodyPr/>
           <a:lstStyle/>
           <a:p>
-            <a:fld id="{01DF3F40-F578-4070-8275-6AD5C9D05345}" type="datetimeFigureOut">
+            <a:fld id="{603D6C51-3858-4B5B-B9E8-CC98B942A82A}" type="datetimeFigureOut">
               <a:rPr kumimoji="1" lang="ja-JP" altLang="en-US" smtClean="0"/>
               <a:t>2026/7/30</a:t>
             </a:fld>
@@ -2191,7 +2191,7 @@
           <p:cNvPr id="4" name="フッター プレースホルダー 3">
             <a:extLst>
               <a:ext uri="{FF2B5EF4-FFF2-40B4-BE49-F238E27FC236}">
-                <a16:creationId xmlns:a16="http://schemas.microsoft.com/office/drawing/2014/main" id="{01A45F26-1AA0-8EF0-20DB-12C5351F2E12}"/>
+                <a16:creationId xmlns:a16="http://schemas.microsoft.com/office/drawing/2014/main" id="{EC9B865C-B0B4-2618-EEF7-9D3BC10DBC18}"/>
               </a:ext>
             </a:extLst>
           </p:cNvPr>
@@ -2216,7 +2216,7 @@
           <p:cNvPr id="5" name="スライド番号プレースホルダー 4">
             <a:extLst>
               <a:ext uri="{FF2B5EF4-FFF2-40B4-BE49-F238E27FC236}">
-                <a16:creationId xmlns:a16="http://schemas.microsoft.com/office/drawing/2014/main" id="{9B3BD119-58FF-C8A8-D2EE-98190B08D8E3}"/>
+                <a16:creationId xmlns:a16="http://schemas.microsoft.com/office/drawing/2014/main" id="{D956E2D4-53D1-D474-2E80-FCADB19DAF2D}"/>
               </a:ext>
             </a:extLst>
           </p:cNvPr>
@@ -2232,7 +2232,7 @@
           <a:bodyPr/>
           <a:lstStyle/>
           <a:p>
-            <a:fld id="{F8D92D34-3AA4-4C1C-B030-5CB7F31C0DCF}" type="slidenum">
+            <a:fld id="{0420BAE1-84E1-4DCD-B79B-8E4049F34B26}" type="slidenum">
               <a:rPr kumimoji="1" lang="ja-JP" altLang="en-US" smtClean="0"/>
               <a:t>‹#›</a:t>
             </a:fld>
@@ -2243,7 +2243,7 @@
     </p:spTree>
     <p:extLst>
       <p:ext uri="{BB962C8B-B14F-4D97-AF65-F5344CB8AC3E}">
-        <p14:creationId xmlns:p14="http://schemas.microsoft.com/office/powerpoint/2010/main" val="294702458"/>
+        <p14:creationId xmlns:p14="http://schemas.microsoft.com/office/powerpoint/2010/main" val="4098547710"/>
       </p:ext>
     </p:extLst>
   </p:cSld>
@@ -2275,7 +2275,7 @@
           <p:cNvPr id="2" name="日付プレースホルダー 1">
             <a:extLst>
               <a:ext uri="{FF2B5EF4-FFF2-40B4-BE49-F238E27FC236}">
-                <a16:creationId xmlns:a16="http://schemas.microsoft.com/office/drawing/2014/main" id="{34C3D619-9DCD-E52B-3721-BD9339047B16}"/>
+                <a16:creationId xmlns:a16="http://schemas.microsoft.com/office/drawing/2014/main" id="{205F25A6-8F42-1364-FF2F-D0D2DA04AC9E}"/>
               </a:ext>
             </a:extLst>
           </p:cNvPr>
@@ -2291,7 +2291,7 @@
           <a:bodyPr/>
           <a:lstStyle/>
           <a:p>
-            <a:fld id="{01DF3F40-F578-4070-8275-6AD5C9D05345}" type="datetimeFigureOut">
+            <a:fld id="{603D6C51-3858-4B5B-B9E8-CC98B942A82A}" type="datetimeFigureOut">
               <a:rPr kumimoji="1" lang="ja-JP" altLang="en-US" smtClean="0"/>
               <a:t>2026/7/30</a:t>
             </a:fld>
@@ -2304,7 +2304,7 @@
           <p:cNvPr id="3" name="フッター プレースホルダー 2">
             <a:extLst>
               <a:ext uri="{FF2B5EF4-FFF2-40B4-BE49-F238E27FC236}">
-                <a16:creationId xmlns:a16="http://schemas.microsoft.com/office/drawing/2014/main" id="{8D6153FD-0A03-FB3D-EE46-E7186E9449C8}"/>
+                <a16:creationId xmlns:a16="http://schemas.microsoft.com/office/drawing/2014/main" id="{B5B31A80-E0ED-CCE3-BE9D-F4913097B41C}"/>
               </a:ext>
             </a:extLst>
           </p:cNvPr>
@@ -2329,7 +2329,7 @@
           <p:cNvPr id="4" name="スライド番号プレースホルダー 3">
             <a:extLst>
               <a:ext uri="{FF2B5EF4-FFF2-40B4-BE49-F238E27FC236}">
-                <a16:creationId xmlns:a16="http://schemas.microsoft.com/office/drawing/2014/main" id="{2B54C7FB-C6B6-7AB9-9CA5-9725519AA025}"/>
+                <a16:creationId xmlns:a16="http://schemas.microsoft.com/office/drawing/2014/main" id="{AC811A67-6E5C-158C-318F-210A4C927331}"/>
               </a:ext>
             </a:extLst>
           </p:cNvPr>
@@ -2345,7 +2345,7 @@
           <a:bodyPr/>
           <a:lstStyle/>
           <a:p>
-            <a:fld id="{F8D92D34-3AA4-4C1C-B030-5CB7F31C0DCF}" type="slidenum">
+            <a:fld id="{0420BAE1-84E1-4DCD-B79B-8E4049F34B26}" type="slidenum">
               <a:rPr kumimoji="1" lang="ja-JP" altLang="en-US" smtClean="0"/>
               <a:t>‹#›</a:t>
             </a:fld>
@@ -2356,7 +2356,7 @@
     </p:spTree>
     <p:extLst>
       <p:ext uri="{BB962C8B-B14F-4D97-AF65-F5344CB8AC3E}">
-        <p14:creationId xmlns:p14="http://schemas.microsoft.com/office/powerpoint/2010/main" val="1218273916"/>
+        <p14:creationId xmlns:p14="http://schemas.microsoft.com/office/powerpoint/2010/main" val="3200488406"/>
       </p:ext>
     </p:extLst>
   </p:cSld>
@@ -2388,7 +2388,7 @@
           <p:cNvPr id="2" name="タイトル 1">
             <a:extLst>
               <a:ext uri="{FF2B5EF4-FFF2-40B4-BE49-F238E27FC236}">
-                <a16:creationId xmlns:a16="http://schemas.microsoft.com/office/drawing/2014/main" id="{17CEC9E3-5372-91B1-33FF-4E5317D3C594}"/>
+                <a16:creationId xmlns:a16="http://schemas.microsoft.com/office/drawing/2014/main" id="{CC6533F0-3631-3162-A2E0-1644DD08325B}"/>
               </a:ext>
             </a:extLst>
           </p:cNvPr>
@@ -2425,7 +2425,7 @@
           <p:cNvPr id="3" name="コンテンツ プレースホルダー 2">
             <a:extLst>
               <a:ext uri="{FF2B5EF4-FFF2-40B4-BE49-F238E27FC236}">
-                <a16:creationId xmlns:a16="http://schemas.microsoft.com/office/drawing/2014/main" id="{761E86B3-4698-7B6D-1150-B420A03E3645}"/>
+                <a16:creationId xmlns:a16="http://schemas.microsoft.com/office/drawing/2014/main" id="{A99F59DF-C9B5-9562-FFE1-16CFBE5799C9}"/>
               </a:ext>
             </a:extLst>
           </p:cNvPr>
@@ -2547,7 +2547,7 @@
           <p:cNvPr id="4" name="テキスト プレースホルダー 3">
             <a:extLst>
               <a:ext uri="{FF2B5EF4-FFF2-40B4-BE49-F238E27FC236}">
-                <a16:creationId xmlns:a16="http://schemas.microsoft.com/office/drawing/2014/main" id="{4B98362F-222F-D967-AFE4-BFC118642E80}"/>
+                <a16:creationId xmlns:a16="http://schemas.microsoft.com/office/drawing/2014/main" id="{9967C3F6-E5BD-2882-FDB7-2E768EC22C99}"/>
               </a:ext>
             </a:extLst>
           </p:cNvPr>
@@ -2618,7 +2618,7 @@
           <p:cNvPr id="5" name="日付プレースホルダー 4">
             <a:extLst>
               <a:ext uri="{FF2B5EF4-FFF2-40B4-BE49-F238E27FC236}">
-                <a16:creationId xmlns:a16="http://schemas.microsoft.com/office/drawing/2014/main" id="{44C63BE0-4D6D-4B62-DA54-810D6C33626C}"/>
+                <a16:creationId xmlns:a16="http://schemas.microsoft.com/office/drawing/2014/main" id="{340304AC-38DC-3334-25A9-96AEC3ADD933}"/>
               </a:ext>
             </a:extLst>
           </p:cNvPr>
@@ -2634,7 +2634,7 @@
           <a:bodyPr/>
           <a:lstStyle/>
           <a:p>
-            <a:fld id="{01DF3F40-F578-4070-8275-6AD5C9D05345}" type="datetimeFigureOut">
+            <a:fld id="{603D6C51-3858-4B5B-B9E8-CC98B942A82A}" type="datetimeFigureOut">
               <a:rPr kumimoji="1" lang="ja-JP" altLang="en-US" smtClean="0"/>
               <a:t>2026/7/30</a:t>
             </a:fld>
@@ -2647,7 +2647,7 @@
           <p:cNvPr id="6" name="フッター プレースホルダー 5">
             <a:extLst>
               <a:ext uri="{FF2B5EF4-FFF2-40B4-BE49-F238E27FC236}">
-                <a16:creationId xmlns:a16="http://schemas.microsoft.com/office/drawing/2014/main" id="{814FCD19-6EA5-3B42-95F6-FFE1D4C63510}"/>
+                <a16:creationId xmlns:a16="http://schemas.microsoft.com/office/drawing/2014/main" id="{E623A607-C22C-3757-6508-3A3341CB0CAA}"/>
               </a:ext>
             </a:extLst>
           </p:cNvPr>
@@ -2672,7 +2672,7 @@
           <p:cNvPr id="7" name="スライド番号プレースホルダー 6">
             <a:extLst>
               <a:ext uri="{FF2B5EF4-FFF2-40B4-BE49-F238E27FC236}">
-                <a16:creationId xmlns:a16="http://schemas.microsoft.com/office/drawing/2014/main" id="{040DF0EF-35CB-8A15-2507-FC4161CA9DBF}"/>
+                <a16:creationId xmlns:a16="http://schemas.microsoft.com/office/drawing/2014/main" id="{EF5F1B52-CB89-5D5F-E340-0E24D86C6E6C}"/>
               </a:ext>
             </a:extLst>
           </p:cNvPr>
@@ -2688,7 +2688,7 @@
           <a:bodyPr/>
           <a:lstStyle/>
           <a:p>
-            <a:fld id="{F8D92D34-3AA4-4C1C-B030-5CB7F31C0DCF}" type="slidenum">
+            <a:fld id="{0420BAE1-84E1-4DCD-B79B-8E4049F34B26}" type="slidenum">
               <a:rPr kumimoji="1" lang="ja-JP" altLang="en-US" smtClean="0"/>
               <a:t>‹#›</a:t>
             </a:fld>
@@ -2699,7 +2699,7 @@
     </p:spTree>
     <p:extLst>
       <p:ext uri="{BB962C8B-B14F-4D97-AF65-F5344CB8AC3E}">
-        <p14:creationId xmlns:p14="http://schemas.microsoft.com/office/powerpoint/2010/main" val="1595632148"/>
+        <p14:creationId xmlns:p14="http://schemas.microsoft.com/office/powerpoint/2010/main" val="4196209770"/>
       </p:ext>
     </p:extLst>
   </p:cSld>
@@ -2731,7 +2731,7 @@
           <p:cNvPr id="2" name="タイトル 1">
             <a:extLst>
               <a:ext uri="{FF2B5EF4-FFF2-40B4-BE49-F238E27FC236}">
-                <a16:creationId xmlns:a16="http://schemas.microsoft.com/office/drawing/2014/main" id="{C1F1DF0F-9543-9640-6760-4DA23150DA99}"/>
+                <a16:creationId xmlns:a16="http://schemas.microsoft.com/office/drawing/2014/main" id="{9D878DB5-8529-432D-E11A-7D2370821EDC}"/>
               </a:ext>
             </a:extLst>
           </p:cNvPr>
@@ -2768,7 +2768,7 @@
           <p:cNvPr id="3" name="図プレースホルダー 2">
             <a:extLst>
               <a:ext uri="{FF2B5EF4-FFF2-40B4-BE49-F238E27FC236}">
-                <a16:creationId xmlns:a16="http://schemas.microsoft.com/office/drawing/2014/main" id="{8DA0E4AD-99DF-7A53-F6EF-78F4A79609D5}"/>
+                <a16:creationId xmlns:a16="http://schemas.microsoft.com/office/drawing/2014/main" id="{B27DEA87-281D-154D-7BD4-8DD4048FDA41}"/>
               </a:ext>
             </a:extLst>
           </p:cNvPr>
@@ -2835,7 +2835,7 @@
           <p:cNvPr id="4" name="テキスト プレースホルダー 3">
             <a:extLst>
               <a:ext uri="{FF2B5EF4-FFF2-40B4-BE49-F238E27FC236}">
-                <a16:creationId xmlns:a16="http://schemas.microsoft.com/office/drawing/2014/main" id="{1318FF6E-EA9C-5A53-C6AB-03C23E37DEC3}"/>
+                <a16:creationId xmlns:a16="http://schemas.microsoft.com/office/drawing/2014/main" id="{656F0A74-5E0C-8DC8-EE64-B46E70021369}"/>
               </a:ext>
             </a:extLst>
           </p:cNvPr>
@@ -2906,7 +2906,7 @@
           <p:cNvPr id="5" name="日付プレースホルダー 4">
             <a:extLst>
               <a:ext uri="{FF2B5EF4-FFF2-40B4-BE49-F238E27FC236}">
-                <a16:creationId xmlns:a16="http://schemas.microsoft.com/office/drawing/2014/main" id="{ED02357F-844D-09C5-0EDA-6EC3546B1D1C}"/>
+                <a16:creationId xmlns:a16="http://schemas.microsoft.com/office/drawing/2014/main" id="{55A751C1-E69D-A329-C0E8-D39106FFDBB6}"/>
               </a:ext>
             </a:extLst>
           </p:cNvPr>
@@ -2922,7 +2922,7 @@
           <a:bodyPr/>
           <a:lstStyle/>
           <a:p>
-            <a:fld id="{01DF3F40-F578-4070-8275-6AD5C9D05345}" type="datetimeFigureOut">
+            <a:fld id="{603D6C51-3858-4B5B-B9E8-CC98B942A82A}" type="datetimeFigureOut">
               <a:rPr kumimoji="1" lang="ja-JP" altLang="en-US" smtClean="0"/>
               <a:t>2026/7/30</a:t>
             </a:fld>
@@ -2935,7 +2935,7 @@
           <p:cNvPr id="6" name="フッター プレースホルダー 5">
             <a:extLst>
               <a:ext uri="{FF2B5EF4-FFF2-40B4-BE49-F238E27FC236}">
-                <a16:creationId xmlns:a16="http://schemas.microsoft.com/office/drawing/2014/main" id="{7CA3A7E8-846D-908E-0064-872A246E4CA5}"/>
+                <a16:creationId xmlns:a16="http://schemas.microsoft.com/office/drawing/2014/main" id="{5431DF8A-C2F9-CBE4-67C5-FF9C97FBB722}"/>
               </a:ext>
             </a:extLst>
           </p:cNvPr>
@@ -2960,7 +2960,7 @@
           <p:cNvPr id="7" name="スライド番号プレースホルダー 6">
             <a:extLst>
               <a:ext uri="{FF2B5EF4-FFF2-40B4-BE49-F238E27FC236}">
-                <a16:creationId xmlns:a16="http://schemas.microsoft.com/office/drawing/2014/main" id="{5CDF0080-192A-91AB-B1E5-09C9D5DB703A}"/>
+                <a16:creationId xmlns:a16="http://schemas.microsoft.com/office/drawing/2014/main" id="{76A89627-3604-4297-CBEC-3D8B1AA46144}"/>
               </a:ext>
             </a:extLst>
           </p:cNvPr>
@@ -2976,7 +2976,7 @@
           <a:bodyPr/>
           <a:lstStyle/>
           <a:p>
-            <a:fld id="{F8D92D34-3AA4-4C1C-B030-5CB7F31C0DCF}" type="slidenum">
+            <a:fld id="{0420BAE1-84E1-4DCD-B79B-8E4049F34B26}" type="slidenum">
               <a:rPr kumimoji="1" lang="ja-JP" altLang="en-US" smtClean="0"/>
               <a:t>‹#›</a:t>
             </a:fld>
@@ -2987,7 +2987,7 @@
     </p:spTree>
     <p:extLst>
       <p:ext uri="{BB962C8B-B14F-4D97-AF65-F5344CB8AC3E}">
-        <p14:creationId xmlns:p14="http://schemas.microsoft.com/office/powerpoint/2010/main" val="1739148250"/>
+        <p14:creationId xmlns:p14="http://schemas.microsoft.com/office/powerpoint/2010/main" val="3970724412"/>
       </p:ext>
     </p:extLst>
   </p:cSld>
@@ -3024,7 +3024,7 @@
           <p:cNvPr id="2" name="タイトル プレースホルダー 1">
             <a:extLst>
               <a:ext uri="{FF2B5EF4-FFF2-40B4-BE49-F238E27FC236}">
-                <a16:creationId xmlns:a16="http://schemas.microsoft.com/office/drawing/2014/main" id="{2C83126E-E00F-A552-617B-FF4C6ABB7DD9}"/>
+                <a16:creationId xmlns:a16="http://schemas.microsoft.com/office/drawing/2014/main" id="{B7887D40-7F9A-4389-5CA4-A154817B6EF8}"/>
               </a:ext>
             </a:extLst>
           </p:cNvPr>
@@ -3062,7 +3062,7 @@
           <p:cNvPr id="3" name="テキスト プレースホルダー 2">
             <a:extLst>
               <a:ext uri="{FF2B5EF4-FFF2-40B4-BE49-F238E27FC236}">
-                <a16:creationId xmlns:a16="http://schemas.microsoft.com/office/drawing/2014/main" id="{A10149E7-31F7-131B-98D7-F1EE041BC77D}"/>
+                <a16:creationId xmlns:a16="http://schemas.microsoft.com/office/drawing/2014/main" id="{2A514846-221B-0BAA-0610-4884842120A9}"/>
               </a:ext>
             </a:extLst>
           </p:cNvPr>
@@ -3161,7 +3161,7 @@
           <p:cNvPr id="4" name="日付プレースホルダー 3">
             <a:extLst>
               <a:ext uri="{FF2B5EF4-FFF2-40B4-BE49-F238E27FC236}">
-                <a16:creationId xmlns:a16="http://schemas.microsoft.com/office/drawing/2014/main" id="{615BD16D-379D-9D3D-2D33-E092744E8D22}"/>
+                <a16:creationId xmlns:a16="http://schemas.microsoft.com/office/drawing/2014/main" id="{E32CB27C-C148-BF37-860A-DBB3C18A7704}"/>
               </a:ext>
             </a:extLst>
           </p:cNvPr>
@@ -3195,7 +3195,7 @@
             </a:lvl1pPr>
           </a:lstStyle>
           <a:p>
-            <a:fld id="{01DF3F40-F578-4070-8275-6AD5C9D05345}" type="datetimeFigureOut">
+            <a:fld id="{603D6C51-3858-4B5B-B9E8-CC98B942A82A}" type="datetimeFigureOut">
               <a:rPr kumimoji="1" lang="ja-JP" altLang="en-US" smtClean="0"/>
               <a:t>2026/7/30</a:t>
             </a:fld>
@@ -3208,7 +3208,7 @@
           <p:cNvPr id="5" name="フッター プレースホルダー 4">
             <a:extLst>
               <a:ext uri="{FF2B5EF4-FFF2-40B4-BE49-F238E27FC236}">
-                <a16:creationId xmlns:a16="http://schemas.microsoft.com/office/drawing/2014/main" id="{B5EB0BC6-5DCE-1A88-C55A-983BB02089C8}"/>
+                <a16:creationId xmlns:a16="http://schemas.microsoft.com/office/drawing/2014/main" id="{3F7AE38A-E78C-974C-6845-21556E3FE5F7}"/>
               </a:ext>
             </a:extLst>
           </p:cNvPr>
@@ -3251,7 +3251,7 @@
           <p:cNvPr id="6" name="スライド番号プレースホルダー 5">
             <a:extLst>
               <a:ext uri="{FF2B5EF4-FFF2-40B4-BE49-F238E27FC236}">
-                <a16:creationId xmlns:a16="http://schemas.microsoft.com/office/drawing/2014/main" id="{E71ABA2D-1041-AFAC-D143-A68754FDAE9A}"/>
+                <a16:creationId xmlns:a16="http://schemas.microsoft.com/office/drawing/2014/main" id="{BDFACD95-6C26-456A-5495-590D6279FD3F}"/>
               </a:ext>
             </a:extLst>
           </p:cNvPr>
@@ -3285,7 +3285,7 @@
             </a:lvl1pPr>
           </a:lstStyle>
           <a:p>
-            <a:fld id="{F8D92D34-3AA4-4C1C-B030-5CB7F31C0DCF}" type="slidenum">
+            <a:fld id="{0420BAE1-84E1-4DCD-B79B-8E4049F34B26}" type="slidenum">
               <a:rPr kumimoji="1" lang="ja-JP" altLang="en-US" smtClean="0"/>
               <a:t>‹#›</a:t>
             </a:fld>
@@ -3296,7 +3296,7 @@
     </p:spTree>
     <p:extLst>
       <p:ext uri="{BB962C8B-B14F-4D97-AF65-F5344CB8AC3E}">
-        <p14:creationId xmlns:p14="http://schemas.microsoft.com/office/powerpoint/2010/main" val="1265877528"/>
+        <p14:creationId xmlns:p14="http://schemas.microsoft.com/office/powerpoint/2010/main" val="2657874805"/>
       </p:ext>
     </p:extLst>
   </p:cSld>
@@ -3619,7 +3619,7 @@
           <p:cNvPr id="2" name="テキスト ボックス 1">
             <a:extLst>
               <a:ext uri="{FF2B5EF4-FFF2-40B4-BE49-F238E27FC236}">
-                <a16:creationId xmlns:a16="http://schemas.microsoft.com/office/drawing/2014/main" id="{8D2AAB65-5CFE-DE08-1691-EE9CA2BF16D7}"/>
+                <a16:creationId xmlns:a16="http://schemas.microsoft.com/office/drawing/2014/main" id="{D8CF2986-86AD-174D-928C-FF4D1C732491}"/>
               </a:ext>
             </a:extLst>
           </p:cNvPr>
@@ -3665,7 +3665,7 @@
           <p:cNvPr id="3" name="テキスト ボックス 2">
             <a:extLst>
               <a:ext uri="{FF2B5EF4-FFF2-40B4-BE49-F238E27FC236}">
-                <a16:creationId xmlns:a16="http://schemas.microsoft.com/office/drawing/2014/main" id="{00E094AC-9799-2FCF-0994-AA0DBB6CC8B1}"/>
+                <a16:creationId xmlns:a16="http://schemas.microsoft.com/office/drawing/2014/main" id="{B5EDE4BE-A08F-EC99-B0F3-9A75FB5853E4}"/>
               </a:ext>
             </a:extLst>
           </p:cNvPr>
@@ -3714,7 +3714,7 @@
           <p:cNvPr id="4" name="テキスト ボックス 3">
             <a:extLst>
               <a:ext uri="{FF2B5EF4-FFF2-40B4-BE49-F238E27FC236}">
-                <a16:creationId xmlns:a16="http://schemas.microsoft.com/office/drawing/2014/main" id="{D1A626B1-9218-645C-183A-85B841CF4497}"/>
+                <a16:creationId xmlns:a16="http://schemas.microsoft.com/office/drawing/2014/main" id="{4FC36A69-363F-56C1-F532-4F196D4D46C9}"/>
               </a:ext>
             </a:extLst>
           </p:cNvPr>
@@ -3754,7 +3754,7 @@
           <p:cNvPr id="5" name="テキスト ボックス 4">
             <a:extLst>
               <a:ext uri="{FF2B5EF4-FFF2-40B4-BE49-F238E27FC236}">
-                <a16:creationId xmlns:a16="http://schemas.microsoft.com/office/drawing/2014/main" id="{40D04957-B48A-826C-4FDE-3CBF1850374C}"/>
+                <a16:creationId xmlns:a16="http://schemas.microsoft.com/office/drawing/2014/main" id="{4D711A97-0111-0048-48F5-A4A1911167B5}"/>
               </a:ext>
             </a:extLst>
           </p:cNvPr>
@@ -3801,7 +3801,7 @@
             <a:hlinkClick r:id="" action="ppaction://media"/>
             <a:extLst>
               <a:ext uri="{FF2B5EF4-FFF2-40B4-BE49-F238E27FC236}">
-                <a16:creationId xmlns:a16="http://schemas.microsoft.com/office/drawing/2014/main" id="{E9104193-3814-9C90-1F46-909392734925}"/>
+                <a16:creationId xmlns:a16="http://schemas.microsoft.com/office/drawing/2014/main" id="{01BB962B-4605-7F83-4135-29E8A5B2E072}"/>
               </a:ext>
             </a:extLst>
           </p:cNvPr>
@@ -3836,7 +3836,7 @@
     </p:spTree>
     <p:extLst>
       <p:ext uri="{BB962C8B-B14F-4D97-AF65-F5344CB8AC3E}">
-        <p14:creationId xmlns:p14="http://schemas.microsoft.com/office/powerpoint/2010/main" val="2977110953"/>
+        <p14:creationId xmlns:p14="http://schemas.microsoft.com/office/powerpoint/2010/main" val="3466446052"/>
       </p:ext>
     </p:extLst>
   </p:cSld>
@@ -3960,7 +3960,7 @@
           <p:cNvPr id="2" name="テキスト ボックス 1">
             <a:extLst>
               <a:ext uri="{FF2B5EF4-FFF2-40B4-BE49-F238E27FC236}">
-                <a16:creationId xmlns:a16="http://schemas.microsoft.com/office/drawing/2014/main" id="{B3568C6D-AAC1-62E5-D4C2-29DA4ADA2005}"/>
+                <a16:creationId xmlns:a16="http://schemas.microsoft.com/office/drawing/2014/main" id="{1BC2FE5A-03DB-D5D5-D5EF-CEC329D3E5AC}"/>
               </a:ext>
             </a:extLst>
           </p:cNvPr>
@@ -4006,7 +4006,7 @@
           <p:cNvPr id="3" name="テキスト ボックス 2">
             <a:extLst>
               <a:ext uri="{FF2B5EF4-FFF2-40B4-BE49-F238E27FC236}">
-                <a16:creationId xmlns:a16="http://schemas.microsoft.com/office/drawing/2014/main" id="{A72ED76A-B100-E851-F2E4-BFF7851E6722}"/>
+                <a16:creationId xmlns:a16="http://schemas.microsoft.com/office/drawing/2014/main" id="{351DD1CD-3923-0684-5654-53658522247A}"/>
               </a:ext>
             </a:extLst>
           </p:cNvPr>
@@ -4046,7 +4046,7 @@
           <p:cNvPr id="4" name="テキスト ボックス 3">
             <a:extLst>
               <a:ext uri="{FF2B5EF4-FFF2-40B4-BE49-F238E27FC236}">
-                <a16:creationId xmlns:a16="http://schemas.microsoft.com/office/drawing/2014/main" id="{384FED78-38E9-0BE0-69C9-C52C55BB7F5E}"/>
+                <a16:creationId xmlns:a16="http://schemas.microsoft.com/office/drawing/2014/main" id="{E01AA1F5-EF89-91EA-0073-6152C984BF1A}"/>
               </a:ext>
             </a:extLst>
           </p:cNvPr>
@@ -4095,7 +4095,7 @@
           <p:cNvPr id="5" name="テキスト ボックス 4">
             <a:extLst>
               <a:ext uri="{FF2B5EF4-FFF2-40B4-BE49-F238E27FC236}">
-                <a16:creationId xmlns:a16="http://schemas.microsoft.com/office/drawing/2014/main" id="{AC470692-2666-7646-AAAD-C4A2BE08BDA8}"/>
+                <a16:creationId xmlns:a16="http://schemas.microsoft.com/office/drawing/2014/main" id="{7E7CEB30-1D0C-56CC-3BC8-4FBD37BB788F}"/>
               </a:ext>
             </a:extLst>
           </p:cNvPr>
@@ -4142,7 +4142,7 @@
             <a:hlinkClick r:id="" action="ppaction://media"/>
             <a:extLst>
               <a:ext uri="{FF2B5EF4-FFF2-40B4-BE49-F238E27FC236}">
-                <a16:creationId xmlns:a16="http://schemas.microsoft.com/office/drawing/2014/main" id="{9AF5CE59-0F5E-1A73-08C2-AF9E06D42D56}"/>
+                <a16:creationId xmlns:a16="http://schemas.microsoft.com/office/drawing/2014/main" id="{CD2145C5-3C44-5D32-AD3F-DA87A51D9DA8}"/>
               </a:ext>
             </a:extLst>
           </p:cNvPr>
@@ -4177,7 +4177,7 @@
     </p:spTree>
     <p:extLst>
       <p:ext uri="{BB962C8B-B14F-4D97-AF65-F5344CB8AC3E}">
-        <p14:creationId xmlns:p14="http://schemas.microsoft.com/office/powerpoint/2010/main" val="1037981212"/>
+        <p14:creationId xmlns:p14="http://schemas.microsoft.com/office/powerpoint/2010/main" val="1633062142"/>
       </p:ext>
     </p:extLst>
   </p:cSld>
@@ -4301,7 +4301,7 @@
           <p:cNvPr id="2" name="テキスト ボックス 1">
             <a:extLst>
               <a:ext uri="{FF2B5EF4-FFF2-40B4-BE49-F238E27FC236}">
-                <a16:creationId xmlns:a16="http://schemas.microsoft.com/office/drawing/2014/main" id="{6189DEDA-1774-C3EF-D625-7C96A5CDAAC9}"/>
+                <a16:creationId xmlns:a16="http://schemas.microsoft.com/office/drawing/2014/main" id="{0048F852-2135-BFAA-A42E-E30301BBE4AB}"/>
               </a:ext>
             </a:extLst>
           </p:cNvPr>
@@ -4347,7 +4347,7 @@
           <p:cNvPr id="3" name="テキスト ボックス 2">
             <a:extLst>
               <a:ext uri="{FF2B5EF4-FFF2-40B4-BE49-F238E27FC236}">
-                <a16:creationId xmlns:a16="http://schemas.microsoft.com/office/drawing/2014/main" id="{9731039E-B997-E892-2B26-B5F24D528EC0}"/>
+                <a16:creationId xmlns:a16="http://schemas.microsoft.com/office/drawing/2014/main" id="{15D3FE04-388A-69FF-E7A5-35FF168E5175}"/>
               </a:ext>
             </a:extLst>
           </p:cNvPr>
@@ -4387,7 +4387,7 @@
           <p:cNvPr id="4" name="テキスト ボックス 3">
             <a:extLst>
               <a:ext uri="{FF2B5EF4-FFF2-40B4-BE49-F238E27FC236}">
-                <a16:creationId xmlns:a16="http://schemas.microsoft.com/office/drawing/2014/main" id="{64A0E048-79C4-4F4A-5CA4-CCD939E8DDDB}"/>
+                <a16:creationId xmlns:a16="http://schemas.microsoft.com/office/drawing/2014/main" id="{64133FFB-1DF6-E09F-9C40-4665C732FC8D}"/>
               </a:ext>
             </a:extLst>
           </p:cNvPr>
@@ -4536,7 +4536,7 @@
           <p:cNvPr id="5" name="テキスト ボックス 4">
             <a:extLst>
               <a:ext uri="{FF2B5EF4-FFF2-40B4-BE49-F238E27FC236}">
-                <a16:creationId xmlns:a16="http://schemas.microsoft.com/office/drawing/2014/main" id="{050D687A-3ED1-6E4E-CE6A-BB76802D1AE2}"/>
+                <a16:creationId xmlns:a16="http://schemas.microsoft.com/office/drawing/2014/main" id="{AC599440-2B8D-4876-0928-04956F0A94DC}"/>
               </a:ext>
             </a:extLst>
           </p:cNvPr>
@@ -4583,7 +4583,7 @@
             <a:hlinkClick r:id="" action="ppaction://media"/>
             <a:extLst>
               <a:ext uri="{FF2B5EF4-FFF2-40B4-BE49-F238E27FC236}">
-                <a16:creationId xmlns:a16="http://schemas.microsoft.com/office/drawing/2014/main" id="{C95FEF62-2E0D-FED9-AFD2-13C10334FE4F}"/>
+                <a16:creationId xmlns:a16="http://schemas.microsoft.com/office/drawing/2014/main" id="{93A48531-62C6-B9EB-2679-F25C20ABC420}"/>
               </a:ext>
             </a:extLst>
           </p:cNvPr>
@@ -4618,7 +4618,7 @@
     </p:spTree>
     <p:extLst>
       <p:ext uri="{BB962C8B-B14F-4D97-AF65-F5344CB8AC3E}">
-        <p14:creationId xmlns:p14="http://schemas.microsoft.com/office/powerpoint/2010/main" val="975050757"/>
+        <p14:creationId xmlns:p14="http://schemas.microsoft.com/office/powerpoint/2010/main" val="1341053686"/>
       </p:ext>
     </p:extLst>
   </p:cSld>
@@ -4742,7 +4742,7 @@
           <p:cNvPr id="2" name="テキスト ボックス 1">
             <a:extLst>
               <a:ext uri="{FF2B5EF4-FFF2-40B4-BE49-F238E27FC236}">
-                <a16:creationId xmlns:a16="http://schemas.microsoft.com/office/drawing/2014/main" id="{81794178-678B-2693-9E14-A901AC3C6334}"/>
+                <a16:creationId xmlns:a16="http://schemas.microsoft.com/office/drawing/2014/main" id="{25D1CC9A-9C46-2D0A-DD79-A35DABCC528B}"/>
               </a:ext>
             </a:extLst>
           </p:cNvPr>
@@ -4788,7 +4788,7 @@
           <p:cNvPr id="3" name="テキスト ボックス 2">
             <a:extLst>
               <a:ext uri="{FF2B5EF4-FFF2-40B4-BE49-F238E27FC236}">
-                <a16:creationId xmlns:a16="http://schemas.microsoft.com/office/drawing/2014/main" id="{3294643D-DF9A-EC6F-7E0D-29E382C05553}"/>
+                <a16:creationId xmlns:a16="http://schemas.microsoft.com/office/drawing/2014/main" id="{DC65FE61-0935-CDCA-9E99-98E93B55934A}"/>
               </a:ext>
             </a:extLst>
           </p:cNvPr>
@@ -4828,7 +4828,7 @@
           <p:cNvPr id="4" name="テキスト ボックス 3">
             <a:extLst>
               <a:ext uri="{FF2B5EF4-FFF2-40B4-BE49-F238E27FC236}">
-                <a16:creationId xmlns:a16="http://schemas.microsoft.com/office/drawing/2014/main" id="{38406D79-E54E-4940-706D-50B1BB1A32FB}"/>
+                <a16:creationId xmlns:a16="http://schemas.microsoft.com/office/drawing/2014/main" id="{DD78E724-82D9-A75A-0280-19A4DB4B7B6A}"/>
               </a:ext>
             </a:extLst>
           </p:cNvPr>
@@ -4938,7 +4938,7 @@
           <p:cNvPr id="5" name="テキスト ボックス 4">
             <a:extLst>
               <a:ext uri="{FF2B5EF4-FFF2-40B4-BE49-F238E27FC236}">
-                <a16:creationId xmlns:a16="http://schemas.microsoft.com/office/drawing/2014/main" id="{C17C5B53-BC6C-EBB3-45E5-14BF01D4F1DE}"/>
+                <a16:creationId xmlns:a16="http://schemas.microsoft.com/office/drawing/2014/main" id="{6E64EAD6-6450-E8EE-E63B-1DB4A8FF808C}"/>
               </a:ext>
             </a:extLst>
           </p:cNvPr>
@@ -4985,7 +4985,7 @@
             <a:hlinkClick r:id="" action="ppaction://media"/>
             <a:extLst>
               <a:ext uri="{FF2B5EF4-FFF2-40B4-BE49-F238E27FC236}">
-                <a16:creationId xmlns:a16="http://schemas.microsoft.com/office/drawing/2014/main" id="{FD49B670-716B-5CEF-5F44-B57C95FD9936}"/>
+                <a16:creationId xmlns:a16="http://schemas.microsoft.com/office/drawing/2014/main" id="{27658107-609E-0941-E907-D1BD989E1EC4}"/>
               </a:ext>
             </a:extLst>
           </p:cNvPr>
@@ -5020,7 +5020,7 @@
     </p:spTree>
     <p:extLst>
       <p:ext uri="{BB962C8B-B14F-4D97-AF65-F5344CB8AC3E}">
-        <p14:creationId xmlns:p14="http://schemas.microsoft.com/office/powerpoint/2010/main" val="3950600686"/>
+        <p14:creationId xmlns:p14="http://schemas.microsoft.com/office/powerpoint/2010/main" val="1853757869"/>
       </p:ext>
     </p:extLst>
   </p:cSld>
@@ -5144,7 +5144,7 @@
           <p:cNvPr id="2" name="テキスト ボックス 1">
             <a:extLst>
               <a:ext uri="{FF2B5EF4-FFF2-40B4-BE49-F238E27FC236}">
-                <a16:creationId xmlns:a16="http://schemas.microsoft.com/office/drawing/2014/main" id="{D43DC959-52CD-E693-BDCF-36C5857518E5}"/>
+                <a16:creationId xmlns:a16="http://schemas.microsoft.com/office/drawing/2014/main" id="{51F9A2FD-17CA-6C55-7614-1E735EECA0A5}"/>
               </a:ext>
             </a:extLst>
           </p:cNvPr>
@@ -5190,7 +5190,7 @@
           <p:cNvPr id="3" name="テキスト ボックス 2">
             <a:extLst>
               <a:ext uri="{FF2B5EF4-FFF2-40B4-BE49-F238E27FC236}">
-                <a16:creationId xmlns:a16="http://schemas.microsoft.com/office/drawing/2014/main" id="{D1A8980D-E881-714E-C6FB-D13DF0508BB7}"/>
+                <a16:creationId xmlns:a16="http://schemas.microsoft.com/office/drawing/2014/main" id="{758812B3-0D7B-FD16-E4B0-79DB69D4F3F6}"/>
               </a:ext>
             </a:extLst>
           </p:cNvPr>
@@ -5230,7 +5230,7 @@
           <p:cNvPr id="4" name="テキスト ボックス 3">
             <a:extLst>
               <a:ext uri="{FF2B5EF4-FFF2-40B4-BE49-F238E27FC236}">
-                <a16:creationId xmlns:a16="http://schemas.microsoft.com/office/drawing/2014/main" id="{BACBBBAC-574C-7438-A031-F24A18A54CD4}"/>
+                <a16:creationId xmlns:a16="http://schemas.microsoft.com/office/drawing/2014/main" id="{0ED0CF72-9C69-7252-E65D-E874D56F9C02}"/>
               </a:ext>
             </a:extLst>
           </p:cNvPr>
@@ -5254,20 +5254,14 @@
           <a:lstStyle/>
           <a:p>
             <a:r>
-              <a:rPr kumimoji="1" lang="en-US" altLang="ja-JP" sz="2000">
+              <a:rPr kumimoji="1" lang="ja-JP" altLang="en-US" sz="2000">
                 <a:solidFill>
                   <a:srgbClr val="333333"/>
                 </a:solidFill>
                 <a:latin typeface="Arial" panose="020B0604020202020204" pitchFamily="34" charset="0"/>
               </a:rPr>
-              <a:t>Add SEO, LLMO, and UGC activation features for Astro and WordPress.</a:t>
-            </a:r>
-            <a:endParaRPr kumimoji="1" lang="ja-JP" altLang="en-US" sz="2000">
-              <a:solidFill>
-                <a:srgbClr val="333333"/>
-              </a:solidFill>
-              <a:latin typeface="Arial" panose="020B0604020202020204" pitchFamily="34" charset="0"/>
-            </a:endParaRPr>
+              <a:t>直近のコミットでは、新機能の追加と実装強化が行われました。</a:t>
+            </a:r>
           </a:p>
         </p:txBody>
       </p:sp>
@@ -5276,7 +5270,7 @@
           <p:cNvPr id="5" name="テキスト ボックス 4">
             <a:extLst>
               <a:ext uri="{FF2B5EF4-FFF2-40B4-BE49-F238E27FC236}">
-                <a16:creationId xmlns:a16="http://schemas.microsoft.com/office/drawing/2014/main" id="{C4C67656-66A6-C393-FB3E-8600B22F7635}"/>
+                <a16:creationId xmlns:a16="http://schemas.microsoft.com/office/drawing/2014/main" id="{B16FFE2A-E7CD-33A5-4DDA-C1A5A21B350B}"/>
               </a:ext>
             </a:extLst>
           </p:cNvPr>
@@ -5323,7 +5317,7 @@
             <a:hlinkClick r:id="" action="ppaction://media"/>
             <a:extLst>
               <a:ext uri="{FF2B5EF4-FFF2-40B4-BE49-F238E27FC236}">
-                <a16:creationId xmlns:a16="http://schemas.microsoft.com/office/drawing/2014/main" id="{0D160812-D7F4-593D-46A7-8E0B19502390}"/>
+                <a16:creationId xmlns:a16="http://schemas.microsoft.com/office/drawing/2014/main" id="{D7B4F9F6-C0BF-CBC9-2D98-12092C4FB174}"/>
               </a:ext>
             </a:extLst>
           </p:cNvPr>
@@ -5358,7 +5352,7 @@
     </p:spTree>
     <p:extLst>
       <p:ext uri="{BB962C8B-B14F-4D97-AF65-F5344CB8AC3E}">
-        <p14:creationId xmlns:p14="http://schemas.microsoft.com/office/powerpoint/2010/main" val="4267764126"/>
+        <p14:creationId xmlns:p14="http://schemas.microsoft.com/office/powerpoint/2010/main" val="1520042478"/>
       </p:ext>
     </p:extLst>
   </p:cSld>
@@ -5367,10 +5361,10 @@
   </p:clrMapOvr>
   <mc:AlternateContent xmlns:mc="http://schemas.openxmlformats.org/markup-compatibility/2006">
     <mc:Choice xmlns:p14="http://schemas.microsoft.com/office/powerpoint/2010/main" Requires="p14">
-      <p:transition spd="slow" p14:dur="2000" advTm="12000"/>
+      <p:transition spd="slow" p14:dur="2000" advTm="6000"/>
     </mc:Choice>
     <mc:Fallback>
-      <p:transition spd="slow" advTm="12000"/>
+      <p:transition spd="slow" advTm="6000"/>
     </mc:Fallback>
   </mc:AlternateContent>
   <p:timing>
@@ -5401,7 +5395,7 @@
                                   <p:childTnLst>
                                     <p:cmd type="call" cmd="playFrom(0.0)">
                                       <p:cBhvr>
-                                        <p:cTn id="6" dur="11129" fill="hold"/>
+                                        <p:cTn id="6" dur="5687" fill="hold"/>
                                         <p:tgtEl>
                                           <p:spTgt spid="6"/>
                                         </p:tgtEl>
@@ -5482,7 +5476,7 @@
           <p:cNvPr id="2" name="テキスト ボックス 1">
             <a:extLst>
               <a:ext uri="{FF2B5EF4-FFF2-40B4-BE49-F238E27FC236}">
-                <a16:creationId xmlns:a16="http://schemas.microsoft.com/office/drawing/2014/main" id="{D1EBA0C9-D5EE-D262-73F7-E4F1E82445AB}"/>
+                <a16:creationId xmlns:a16="http://schemas.microsoft.com/office/drawing/2014/main" id="{F963F175-F5BE-62C9-16A0-A377A60DB150}"/>
               </a:ext>
             </a:extLst>
           </p:cNvPr>
@@ -5528,7 +5522,7 @@
           <p:cNvPr id="3" name="テキスト ボックス 2">
             <a:extLst>
               <a:ext uri="{FF2B5EF4-FFF2-40B4-BE49-F238E27FC236}">
-                <a16:creationId xmlns:a16="http://schemas.microsoft.com/office/drawing/2014/main" id="{7D9A498C-9AC3-C99F-51C0-82FAACAE6369}"/>
+                <a16:creationId xmlns:a16="http://schemas.microsoft.com/office/drawing/2014/main" id="{83344ED4-ABDA-52A2-4746-91A83AF8E5CA}"/>
               </a:ext>
             </a:extLst>
           </p:cNvPr>
@@ -5568,7 +5562,7 @@
           <p:cNvPr id="4" name="テキスト ボックス 3">
             <a:extLst>
               <a:ext uri="{FF2B5EF4-FFF2-40B4-BE49-F238E27FC236}">
-                <a16:creationId xmlns:a16="http://schemas.microsoft.com/office/drawing/2014/main" id="{604261D9-0CC2-2ECD-088A-3873A498BDD5}"/>
+                <a16:creationId xmlns:a16="http://schemas.microsoft.com/office/drawing/2014/main" id="{081C174A-25DF-CD19-66BE-003AEDD5B641}"/>
               </a:ext>
             </a:extLst>
           </p:cNvPr>
@@ -5633,7 +5627,7 @@
           <p:cNvPr id="5" name="テキスト ボックス 4">
             <a:extLst>
               <a:ext uri="{FF2B5EF4-FFF2-40B4-BE49-F238E27FC236}">
-                <a16:creationId xmlns:a16="http://schemas.microsoft.com/office/drawing/2014/main" id="{FA2B3BE7-3F9D-22DA-7D2A-8D3AFC76E9EC}"/>
+                <a16:creationId xmlns:a16="http://schemas.microsoft.com/office/drawing/2014/main" id="{8868227E-5A5A-56FA-3643-115A47960441}"/>
               </a:ext>
             </a:extLst>
           </p:cNvPr>
@@ -5680,7 +5674,7 @@
             <a:hlinkClick r:id="" action="ppaction://media"/>
             <a:extLst>
               <a:ext uri="{FF2B5EF4-FFF2-40B4-BE49-F238E27FC236}">
-                <a16:creationId xmlns:a16="http://schemas.microsoft.com/office/drawing/2014/main" id="{05F99E42-13A8-D3C9-209F-E380C4CDAAB3}"/>
+                <a16:creationId xmlns:a16="http://schemas.microsoft.com/office/drawing/2014/main" id="{B61CC254-9D12-25A4-94F9-461B1FB03963}"/>
               </a:ext>
             </a:extLst>
           </p:cNvPr>
@@ -5715,7 +5709,7 @@
     </p:spTree>
     <p:extLst>
       <p:ext uri="{BB962C8B-B14F-4D97-AF65-F5344CB8AC3E}">
-        <p14:creationId xmlns:p14="http://schemas.microsoft.com/office/powerpoint/2010/main" val="2336228301"/>
+        <p14:creationId xmlns:p14="http://schemas.microsoft.com/office/powerpoint/2010/main" val="456808476"/>
       </p:ext>
     </p:extLst>
   </p:cSld>
